--- a/fig/dawiy_system.pptx
+++ b/fig/dawiy_system.pptx
@@ -4084,10 +4084,10 @@
       </p:grpSpPr>
       <p:grpSp>
         <p:nvGrpSpPr>
-          <p:cNvPr id="591" name="グループ化 590">
+          <p:cNvPr id="88" name="グループ化 87">
             <a:extLst>
               <a:ext uri="{FF2B5EF4-FFF2-40B4-BE49-F238E27FC236}">
-                <a16:creationId xmlns:a16="http://schemas.microsoft.com/office/drawing/2014/main" id="{2D9C0ACB-CFC7-5BE5-EBB3-AADFD3A96955}"/>
+                <a16:creationId xmlns:a16="http://schemas.microsoft.com/office/drawing/2014/main" id="{80C659F7-3FB2-D5D0-FCF9-31051F3A3BB9}"/>
               </a:ext>
             </a:extLst>
           </p:cNvPr>
@@ -4096,104 +4096,12 @@
         </p:nvGrpSpPr>
         <p:grpSpPr>
           <a:xfrm>
-            <a:off x="346198" y="45609"/>
-            <a:ext cx="11505830" cy="6756785"/>
-            <a:chOff x="258278" y="45609"/>
-            <a:chExt cx="11505830" cy="6756785"/>
+            <a:off x="238746" y="46539"/>
+            <a:ext cx="11844963" cy="6688202"/>
+            <a:chOff x="269226" y="77019"/>
+            <a:chExt cx="11844963" cy="6688202"/>
           </a:xfrm>
         </p:grpSpPr>
-        <p:cxnSp>
-          <p:nvCxnSpPr>
-            <p:cNvPr id="4" name="直線コネクタ 3">
-              <a:extLst>
-                <a:ext uri="{FF2B5EF4-FFF2-40B4-BE49-F238E27FC236}">
-                  <a16:creationId xmlns:a16="http://schemas.microsoft.com/office/drawing/2014/main" id="{AA080D4A-8262-FFD2-5FA1-2BF23E60CA2E}"/>
-                </a:ext>
-              </a:extLst>
-            </p:cNvPr>
-            <p:cNvCxnSpPr>
-              <a:cxnSpLocks/>
-            </p:cNvCxnSpPr>
-            <p:nvPr/>
-          </p:nvCxnSpPr>
-          <p:spPr>
-            <a:xfrm>
-              <a:off x="6848717" y="295975"/>
-              <a:ext cx="0" cy="6400800"/>
-            </a:xfrm>
-            <a:prstGeom prst="line">
-              <a:avLst/>
-            </a:prstGeom>
-            <a:ln w="38100">
-              <a:solidFill>
-                <a:schemeClr val="bg1">
-                  <a:lumMod val="75000"/>
-                </a:schemeClr>
-              </a:solidFill>
-              <a:prstDash val="solid"/>
-            </a:ln>
-          </p:spPr>
-          <p:style>
-            <a:lnRef idx="2">
-              <a:schemeClr val="accent1"/>
-            </a:lnRef>
-            <a:fillRef idx="0">
-              <a:schemeClr val="accent1"/>
-            </a:fillRef>
-            <a:effectRef idx="1">
-              <a:schemeClr val="accent1"/>
-            </a:effectRef>
-            <a:fontRef idx="minor">
-              <a:schemeClr val="tx1"/>
-            </a:fontRef>
-          </p:style>
-        </p:cxnSp>
-        <p:cxnSp>
-          <p:nvCxnSpPr>
-            <p:cNvPr id="5" name="直線コネクタ 4">
-              <a:extLst>
-                <a:ext uri="{FF2B5EF4-FFF2-40B4-BE49-F238E27FC236}">
-                  <a16:creationId xmlns:a16="http://schemas.microsoft.com/office/drawing/2014/main" id="{A3243F7A-5EE0-9E95-6F19-3F33018A333B}"/>
-                </a:ext>
-              </a:extLst>
-            </p:cNvPr>
-            <p:cNvCxnSpPr>
-              <a:cxnSpLocks/>
-            </p:cNvCxnSpPr>
-            <p:nvPr/>
-          </p:nvCxnSpPr>
-          <p:spPr>
-            <a:xfrm>
-              <a:off x="3481347" y="295975"/>
-              <a:ext cx="0" cy="6379142"/>
-            </a:xfrm>
-            <a:prstGeom prst="line">
-              <a:avLst/>
-            </a:prstGeom>
-            <a:ln w="38100">
-              <a:solidFill>
-                <a:schemeClr val="bg1">
-                  <a:lumMod val="75000"/>
-                </a:schemeClr>
-              </a:solidFill>
-              <a:prstDash val="solid"/>
-            </a:ln>
-          </p:spPr>
-          <p:style>
-            <a:lnRef idx="2">
-              <a:schemeClr val="accent1"/>
-            </a:lnRef>
-            <a:fillRef idx="0">
-              <a:schemeClr val="accent1"/>
-            </a:fillRef>
-            <a:effectRef idx="1">
-              <a:schemeClr val="accent1"/>
-            </a:effectRef>
-            <a:fontRef idx="minor">
-              <a:schemeClr val="tx1"/>
-            </a:fontRef>
-          </p:style>
-        </p:cxnSp>
         <p:sp>
           <p:nvSpPr>
             <p:cNvPr id="6" name="四角形: 角を丸くする 5">
@@ -4208,15 +4116,19 @@
           </p:nvSpPr>
           <p:spPr>
             <a:xfrm>
-              <a:off x="258278" y="295975"/>
-              <a:ext cx="11505830" cy="6400800"/>
+              <a:off x="3443701" y="345439"/>
+              <a:ext cx="8281002" cy="6351335"/>
             </a:xfrm>
             <a:prstGeom prst="roundRect">
               <a:avLst>
                 <a:gd name="adj" fmla="val 3492"/>
               </a:avLst>
             </a:prstGeom>
-            <a:noFill/>
+            <a:solidFill>
+              <a:schemeClr val="bg1">
+                <a:lumMod val="95000"/>
+              </a:schemeClr>
+            </a:solidFill>
             <a:ln w="57150">
               <a:solidFill>
                 <a:schemeClr val="tx1"/>
@@ -4250,6 +4162,338 @@
         </p:sp>
         <p:sp>
           <p:nvSpPr>
+            <p:cNvPr id="3" name="四角形: 角を丸くする 2">
+              <a:extLst>
+                <a:ext uri="{FF2B5EF4-FFF2-40B4-BE49-F238E27FC236}">
+                  <a16:creationId xmlns:a16="http://schemas.microsoft.com/office/drawing/2014/main" id="{91E4C5E8-8589-0B81-C0EA-B1231EB78720}"/>
+                </a:ext>
+              </a:extLst>
+            </p:cNvPr>
+            <p:cNvSpPr>
+              <a:spLocks/>
+            </p:cNvSpPr>
+            <p:nvPr/>
+          </p:nvSpPr>
+          <p:spPr>
+            <a:xfrm>
+              <a:off x="7015156" y="3658779"/>
+              <a:ext cx="4715255" cy="3027832"/>
+            </a:xfrm>
+            <a:prstGeom prst="roundRect">
+              <a:avLst>
+                <a:gd name="adj" fmla="val 9347"/>
+              </a:avLst>
+            </a:prstGeom>
+            <a:solidFill>
+              <a:schemeClr val="bg1"/>
+            </a:solidFill>
+            <a:ln w="57150">
+              <a:solidFill>
+                <a:schemeClr val="tx1"/>
+              </a:solidFill>
+            </a:ln>
+          </p:spPr>
+          <p:style>
+            <a:lnRef idx="2">
+              <a:schemeClr val="accent1">
+                <a:shade val="15000"/>
+              </a:schemeClr>
+            </a:lnRef>
+            <a:fillRef idx="1">
+              <a:schemeClr val="accent1"/>
+            </a:fillRef>
+            <a:effectRef idx="0">
+              <a:schemeClr val="accent1"/>
+            </a:effectRef>
+            <a:fontRef idx="minor">
+              <a:schemeClr val="lt1"/>
+            </a:fontRef>
+          </p:style>
+          <p:txBody>
+            <a:bodyPr rtlCol="0" anchor="ctr"/>
+            <a:lstStyle/>
+            <a:p>
+              <a:pPr algn="ctr"/>
+              <a:endParaRPr lang="ja-JP" altLang="en-US"/>
+            </a:p>
+          </p:txBody>
+        </p:sp>
+        <p:sp>
+          <p:nvSpPr>
+            <p:cNvPr id="12" name="正方形/長方形 11">
+              <a:extLst>
+                <a:ext uri="{FF2B5EF4-FFF2-40B4-BE49-F238E27FC236}">
+                  <a16:creationId xmlns:a16="http://schemas.microsoft.com/office/drawing/2014/main" id="{C33D642E-3739-F631-F753-C2474459AD77}"/>
+                </a:ext>
+              </a:extLst>
+            </p:cNvPr>
+            <p:cNvSpPr/>
+            <p:nvPr/>
+          </p:nvSpPr>
+          <p:spPr>
+            <a:xfrm>
+              <a:off x="6830966" y="6370321"/>
+              <a:ext cx="4893737" cy="394900"/>
+            </a:xfrm>
+            <a:prstGeom prst="rect">
+              <a:avLst/>
+            </a:prstGeom>
+            <a:solidFill>
+              <a:schemeClr val="bg1"/>
+            </a:solidFill>
+            <a:ln>
+              <a:noFill/>
+            </a:ln>
+          </p:spPr>
+          <p:style>
+            <a:lnRef idx="2">
+              <a:schemeClr val="accent1">
+                <a:shade val="15000"/>
+              </a:schemeClr>
+            </a:lnRef>
+            <a:fillRef idx="1">
+              <a:schemeClr val="accent1"/>
+            </a:fillRef>
+            <a:effectRef idx="0">
+              <a:schemeClr val="accent1"/>
+            </a:effectRef>
+            <a:fontRef idx="minor">
+              <a:schemeClr val="lt1"/>
+            </a:fontRef>
+          </p:style>
+          <p:txBody>
+            <a:bodyPr rtlCol="0" anchor="ctr"/>
+            <a:lstStyle/>
+            <a:p>
+              <a:pPr algn="ctr"/>
+              <a:endParaRPr kumimoji="1" lang="ja-JP" altLang="en-US"/>
+            </a:p>
+          </p:txBody>
+        </p:sp>
+        <p:sp>
+          <p:nvSpPr>
+            <p:cNvPr id="13" name="正方形/長方形 12">
+              <a:extLst>
+                <a:ext uri="{FF2B5EF4-FFF2-40B4-BE49-F238E27FC236}">
+                  <a16:creationId xmlns:a16="http://schemas.microsoft.com/office/drawing/2014/main" id="{D13BE352-67AB-B4BC-0EFB-C3CB63D5A087}"/>
+                </a:ext>
+              </a:extLst>
+            </p:cNvPr>
+            <p:cNvSpPr/>
+            <p:nvPr/>
+          </p:nvSpPr>
+          <p:spPr>
+            <a:xfrm flipV="1">
+              <a:off x="11404275" y="3504086"/>
+              <a:ext cx="510326" cy="3192683"/>
+            </a:xfrm>
+            <a:prstGeom prst="rect">
+              <a:avLst/>
+            </a:prstGeom>
+            <a:solidFill>
+              <a:schemeClr val="bg1"/>
+            </a:solidFill>
+            <a:ln>
+              <a:noFill/>
+            </a:ln>
+          </p:spPr>
+          <p:style>
+            <a:lnRef idx="2">
+              <a:schemeClr val="accent1">
+                <a:shade val="15000"/>
+              </a:schemeClr>
+            </a:lnRef>
+            <a:fillRef idx="1">
+              <a:schemeClr val="accent1"/>
+            </a:fillRef>
+            <a:effectRef idx="0">
+              <a:schemeClr val="accent1"/>
+            </a:effectRef>
+            <a:fontRef idx="minor">
+              <a:schemeClr val="lt1"/>
+            </a:fontRef>
+          </p:style>
+          <p:txBody>
+            <a:bodyPr rtlCol="0" anchor="ctr"/>
+            <a:lstStyle/>
+            <a:p>
+              <a:pPr algn="ctr"/>
+              <a:endParaRPr kumimoji="1" lang="ja-JP" altLang="en-US"/>
+            </a:p>
+          </p:txBody>
+        </p:sp>
+        <p:sp>
+          <p:nvSpPr>
+            <p:cNvPr id="464" name="四角形: 角を丸くする 463">
+              <a:extLst>
+                <a:ext uri="{FF2B5EF4-FFF2-40B4-BE49-F238E27FC236}">
+                  <a16:creationId xmlns:a16="http://schemas.microsoft.com/office/drawing/2014/main" id="{3AB890EB-3542-6A98-25C4-C237A1236E32}"/>
+                </a:ext>
+              </a:extLst>
+            </p:cNvPr>
+            <p:cNvSpPr/>
+            <p:nvPr/>
+          </p:nvSpPr>
+          <p:spPr>
+            <a:xfrm>
+              <a:off x="11217774" y="3182620"/>
+              <a:ext cx="507736" cy="474705"/>
+            </a:xfrm>
+            <a:prstGeom prst="roundRect">
+              <a:avLst>
+                <a:gd name="adj" fmla="val 36355"/>
+              </a:avLst>
+            </a:prstGeom>
+            <a:solidFill>
+              <a:schemeClr val="bg1">
+                <a:lumMod val="95000"/>
+              </a:schemeClr>
+            </a:solidFill>
+            <a:ln w="57150">
+              <a:solidFill>
+                <a:schemeClr val="tx1"/>
+              </a:solidFill>
+            </a:ln>
+          </p:spPr>
+          <p:style>
+            <a:lnRef idx="2">
+              <a:schemeClr val="accent1">
+                <a:shade val="15000"/>
+              </a:schemeClr>
+            </a:lnRef>
+            <a:fillRef idx="1">
+              <a:schemeClr val="accent1"/>
+            </a:fillRef>
+            <a:effectRef idx="0">
+              <a:schemeClr val="accent1"/>
+            </a:effectRef>
+            <a:fontRef idx="minor">
+              <a:schemeClr val="lt1"/>
+            </a:fontRef>
+          </p:style>
+          <p:txBody>
+            <a:bodyPr rtlCol="0" anchor="ctr"/>
+            <a:lstStyle/>
+            <a:p>
+              <a:pPr algn="ctr"/>
+              <a:endParaRPr lang="ja-JP" altLang="en-US" sz="1600" dirty="0">
+                <a:solidFill>
+                  <a:schemeClr val="tx1"/>
+                </a:solidFill>
+              </a:endParaRPr>
+            </a:p>
+          </p:txBody>
+        </p:sp>
+        <p:sp>
+          <p:nvSpPr>
+            <p:cNvPr id="466" name="正方形/長方形 465">
+              <a:extLst>
+                <a:ext uri="{FF2B5EF4-FFF2-40B4-BE49-F238E27FC236}">
+                  <a16:creationId xmlns:a16="http://schemas.microsoft.com/office/drawing/2014/main" id="{C9C6D8DE-9E07-F609-A356-F7F7675F8636}"/>
+                </a:ext>
+              </a:extLst>
+            </p:cNvPr>
+            <p:cNvSpPr/>
+            <p:nvPr/>
+          </p:nvSpPr>
+          <p:spPr>
+            <a:xfrm>
+              <a:off x="11077886" y="3126856"/>
+              <a:ext cx="618853" cy="243301"/>
+            </a:xfrm>
+            <a:prstGeom prst="rect">
+              <a:avLst/>
+            </a:prstGeom>
+            <a:solidFill>
+              <a:schemeClr val="bg1">
+                <a:lumMod val="95000"/>
+              </a:schemeClr>
+            </a:solidFill>
+            <a:ln>
+              <a:noFill/>
+            </a:ln>
+          </p:spPr>
+          <p:style>
+            <a:lnRef idx="2">
+              <a:schemeClr val="accent1">
+                <a:shade val="15000"/>
+              </a:schemeClr>
+            </a:lnRef>
+            <a:fillRef idx="1">
+              <a:schemeClr val="accent1"/>
+            </a:fillRef>
+            <a:effectRef idx="0">
+              <a:schemeClr val="accent1"/>
+            </a:effectRef>
+            <a:fontRef idx="minor">
+              <a:schemeClr val="lt1"/>
+            </a:fontRef>
+          </p:style>
+          <p:txBody>
+            <a:bodyPr rtlCol="0" anchor="ctr"/>
+            <a:lstStyle/>
+            <a:p>
+              <a:pPr algn="ctr"/>
+              <a:endParaRPr kumimoji="1" lang="ja-JP" altLang="en-US"/>
+            </a:p>
+          </p:txBody>
+        </p:sp>
+        <p:sp>
+          <p:nvSpPr>
+            <p:cNvPr id="468" name="正方形/長方形 467">
+              <a:extLst>
+                <a:ext uri="{FF2B5EF4-FFF2-40B4-BE49-F238E27FC236}">
+                  <a16:creationId xmlns:a16="http://schemas.microsoft.com/office/drawing/2014/main" id="{80DB3664-5FF3-7C23-1436-ADB68C518BF9}"/>
+                </a:ext>
+              </a:extLst>
+            </p:cNvPr>
+            <p:cNvSpPr/>
+            <p:nvPr/>
+          </p:nvSpPr>
+          <p:spPr>
+            <a:xfrm>
+              <a:off x="10891373" y="3334557"/>
+              <a:ext cx="618853" cy="295850"/>
+            </a:xfrm>
+            <a:prstGeom prst="rect">
+              <a:avLst/>
+            </a:prstGeom>
+            <a:solidFill>
+              <a:schemeClr val="bg1">
+                <a:lumMod val="95000"/>
+              </a:schemeClr>
+            </a:solidFill>
+            <a:ln>
+              <a:noFill/>
+            </a:ln>
+          </p:spPr>
+          <p:style>
+            <a:lnRef idx="2">
+              <a:schemeClr val="accent1">
+                <a:shade val="15000"/>
+              </a:schemeClr>
+            </a:lnRef>
+            <a:fillRef idx="1">
+              <a:schemeClr val="accent1"/>
+            </a:fillRef>
+            <a:effectRef idx="0">
+              <a:schemeClr val="accent1"/>
+            </a:effectRef>
+            <a:fontRef idx="minor">
+              <a:schemeClr val="lt1"/>
+            </a:fontRef>
+          </p:style>
+          <p:txBody>
+            <a:bodyPr rtlCol="0" anchor="ctr"/>
+            <a:lstStyle/>
+            <a:p>
+              <a:pPr algn="ctr"/>
+              <a:endParaRPr kumimoji="1" lang="ja-JP" altLang="en-US"/>
+            </a:p>
+          </p:txBody>
+        </p:sp>
+        <p:sp>
+          <p:nvSpPr>
             <p:cNvPr id="7" name="四角形: 角を丸くする 6">
               <a:extLst>
                 <a:ext uri="{FF2B5EF4-FFF2-40B4-BE49-F238E27FC236}">
@@ -4262,7 +4506,7 @@
           </p:nvSpPr>
           <p:spPr>
             <a:xfrm>
-              <a:off x="5500069" y="6417383"/>
+              <a:off x="7035147" y="137981"/>
               <a:ext cx="1191861" cy="385011"/>
             </a:xfrm>
             <a:prstGeom prst="roundRect">
@@ -4322,10 +4566,10 @@
         </p:sp>
         <p:sp>
           <p:nvSpPr>
-            <p:cNvPr id="8" name="四角形: 角を丸くする 7">
-              <a:extLst>
-                <a:ext uri="{FF2B5EF4-FFF2-40B4-BE49-F238E27FC236}">
-                  <a16:creationId xmlns:a16="http://schemas.microsoft.com/office/drawing/2014/main" id="{3877D7A3-0608-77C0-4522-E3947CAD7110}"/>
+            <p:cNvPr id="2" name="四角形: 角を丸くする 1">
+              <a:extLst>
+                <a:ext uri="{FF2B5EF4-FFF2-40B4-BE49-F238E27FC236}">
+                  <a16:creationId xmlns:a16="http://schemas.microsoft.com/office/drawing/2014/main" id="{6C7F1EF0-13C4-8CF4-9690-651CD77F07D2}"/>
                 </a:ext>
               </a:extLst>
             </p:cNvPr>
@@ -4334,223 +4578,7 @@
           </p:nvSpPr>
           <p:spPr>
             <a:xfrm>
-              <a:off x="1295255" y="45609"/>
-              <a:ext cx="1182502" cy="395437"/>
-            </a:xfrm>
-            <a:prstGeom prst="roundRect">
-              <a:avLst>
-                <a:gd name="adj" fmla="val 27984"/>
-              </a:avLst>
-            </a:prstGeom>
-            <a:solidFill>
-              <a:schemeClr val="bg1"/>
-            </a:solidFill>
-            <a:ln w="57150">
-              <a:solidFill>
-                <a:schemeClr val="tx1"/>
-              </a:solidFill>
-            </a:ln>
-          </p:spPr>
-          <p:style>
-            <a:lnRef idx="2">
-              <a:schemeClr val="accent1">
-                <a:shade val="15000"/>
-              </a:schemeClr>
-            </a:lnRef>
-            <a:fillRef idx="1">
-              <a:schemeClr val="accent1"/>
-            </a:fillRef>
-            <a:effectRef idx="0">
-              <a:schemeClr val="accent1"/>
-            </a:effectRef>
-            <a:fontRef idx="minor">
-              <a:schemeClr val="lt1"/>
-            </a:fontRef>
-          </p:style>
-          <p:txBody>
-            <a:bodyPr rtlCol="0" anchor="ctr"/>
-            <a:lstStyle/>
-            <a:p>
-              <a:pPr algn="ctr"/>
-              <a:r>
-                <a:rPr lang="ja-JP" altLang="en-US" dirty="0">
-                  <a:solidFill>
-                    <a:schemeClr val="tx1"/>
-                  </a:solidFill>
-                  <a:latin typeface="モボ-SemiBold" panose="02000700000000000000" pitchFamily="50" charset="-128"/>
-                  <a:ea typeface="モボ-SemiBold" panose="02000700000000000000" pitchFamily="50" charset="-128"/>
-                </a:rPr>
-                <a:t>入力層</a:t>
-              </a:r>
-              <a:endParaRPr lang="ja-JP" altLang="en-US" sz="1600" dirty="0">
-                <a:solidFill>
-                  <a:schemeClr val="tx1"/>
-                </a:solidFill>
-                <a:latin typeface="モボ-SemiBold" panose="02000700000000000000" pitchFamily="50" charset="-128"/>
-                <a:ea typeface="モボ-SemiBold" panose="02000700000000000000" pitchFamily="50" charset="-128"/>
-              </a:endParaRPr>
-            </a:p>
-          </p:txBody>
-        </p:sp>
-        <p:sp>
-          <p:nvSpPr>
-            <p:cNvPr id="9" name="四角形: 角を丸くする 8">
-              <a:extLst>
-                <a:ext uri="{FF2B5EF4-FFF2-40B4-BE49-F238E27FC236}">
-                  <a16:creationId xmlns:a16="http://schemas.microsoft.com/office/drawing/2014/main" id="{D6EAD422-2DBC-F522-427E-A3C97F4F2B61}"/>
-                </a:ext>
-              </a:extLst>
-            </p:cNvPr>
-            <p:cNvSpPr/>
-            <p:nvPr/>
-          </p:nvSpPr>
-          <p:spPr>
-            <a:xfrm>
-              <a:off x="4482653" y="49310"/>
-              <a:ext cx="1244162" cy="395437"/>
-            </a:xfrm>
-            <a:prstGeom prst="roundRect">
-              <a:avLst>
-                <a:gd name="adj" fmla="val 27984"/>
-              </a:avLst>
-            </a:prstGeom>
-            <a:solidFill>
-              <a:schemeClr val="bg1"/>
-            </a:solidFill>
-            <a:ln w="57150">
-              <a:solidFill>
-                <a:schemeClr val="tx1"/>
-              </a:solidFill>
-            </a:ln>
-          </p:spPr>
-          <p:style>
-            <a:lnRef idx="2">
-              <a:schemeClr val="accent1">
-                <a:shade val="15000"/>
-              </a:schemeClr>
-            </a:lnRef>
-            <a:fillRef idx="1">
-              <a:schemeClr val="accent1"/>
-            </a:fillRef>
-            <a:effectRef idx="0">
-              <a:schemeClr val="accent1"/>
-            </a:effectRef>
-            <a:fontRef idx="minor">
-              <a:schemeClr val="lt1"/>
-            </a:fontRef>
-          </p:style>
-          <p:txBody>
-            <a:bodyPr rtlCol="0" anchor="ctr"/>
-            <a:lstStyle/>
-            <a:p>
-              <a:pPr algn="ctr"/>
-              <a:r>
-                <a:rPr lang="ja-JP" altLang="en-US" dirty="0">
-                  <a:solidFill>
-                    <a:schemeClr val="tx1"/>
-                  </a:solidFill>
-                  <a:latin typeface="モボ-SemiBold" panose="02000700000000000000" pitchFamily="50" charset="-128"/>
-                  <a:ea typeface="モボ-SemiBold" panose="02000700000000000000" pitchFamily="50" charset="-128"/>
-                </a:rPr>
-                <a:t>処理層</a:t>
-              </a:r>
-              <a:endParaRPr lang="ja-JP" altLang="en-US" sz="1600" dirty="0">
-                <a:solidFill>
-                  <a:schemeClr val="tx1"/>
-                </a:solidFill>
-                <a:latin typeface="モボ-SemiBold" panose="02000700000000000000" pitchFamily="50" charset="-128"/>
-                <a:ea typeface="モボ-SemiBold" panose="02000700000000000000" pitchFamily="50" charset="-128"/>
-              </a:endParaRPr>
-            </a:p>
-          </p:txBody>
-        </p:sp>
-        <p:sp>
-          <p:nvSpPr>
-            <p:cNvPr id="10" name="四角形: 角を丸くする 9">
-              <a:extLst>
-                <a:ext uri="{FF2B5EF4-FFF2-40B4-BE49-F238E27FC236}">
-                  <a16:creationId xmlns:a16="http://schemas.microsoft.com/office/drawing/2014/main" id="{4BC3B129-CFA4-020E-112E-DA7B80B44F33}"/>
-                </a:ext>
-              </a:extLst>
-            </p:cNvPr>
-            <p:cNvSpPr/>
-            <p:nvPr/>
-          </p:nvSpPr>
-          <p:spPr>
-            <a:xfrm>
-              <a:off x="8548382" y="47589"/>
-              <a:ext cx="1244162" cy="395437"/>
-            </a:xfrm>
-            <a:prstGeom prst="roundRect">
-              <a:avLst>
-                <a:gd name="adj" fmla="val 27984"/>
-              </a:avLst>
-            </a:prstGeom>
-            <a:solidFill>
-              <a:schemeClr val="bg1"/>
-            </a:solidFill>
-            <a:ln w="57150">
-              <a:solidFill>
-                <a:schemeClr val="tx1"/>
-              </a:solidFill>
-            </a:ln>
-          </p:spPr>
-          <p:style>
-            <a:lnRef idx="2">
-              <a:schemeClr val="accent1">
-                <a:shade val="15000"/>
-              </a:schemeClr>
-            </a:lnRef>
-            <a:fillRef idx="1">
-              <a:schemeClr val="accent1"/>
-            </a:fillRef>
-            <a:effectRef idx="0">
-              <a:schemeClr val="accent1"/>
-            </a:effectRef>
-            <a:fontRef idx="minor">
-              <a:schemeClr val="lt1"/>
-            </a:fontRef>
-          </p:style>
-          <p:txBody>
-            <a:bodyPr rtlCol="0" anchor="ctr"/>
-            <a:lstStyle/>
-            <a:p>
-              <a:pPr algn="ctr"/>
-              <a:r>
-                <a:rPr lang="ja-JP" altLang="en-US" dirty="0">
-                  <a:solidFill>
-                    <a:schemeClr val="tx1"/>
-                  </a:solidFill>
-                  <a:latin typeface="モボ-SemiBold" panose="02000700000000000000" pitchFamily="50" charset="-128"/>
-                  <a:ea typeface="モボ-SemiBold" panose="02000700000000000000" pitchFamily="50" charset="-128"/>
-                </a:rPr>
-                <a:t>出力層</a:t>
-              </a:r>
-              <a:endParaRPr lang="ja-JP" altLang="en-US" sz="1600" dirty="0">
-                <a:solidFill>
-                  <a:schemeClr val="tx1"/>
-                </a:solidFill>
-                <a:latin typeface="モボ-SemiBold" panose="02000700000000000000" pitchFamily="50" charset="-128"/>
-                <a:ea typeface="モボ-SemiBold" panose="02000700000000000000" pitchFamily="50" charset="-128"/>
-              </a:endParaRPr>
-            </a:p>
-          </p:txBody>
-        </p:sp>
-        <p:sp>
-          <p:nvSpPr>
-            <p:cNvPr id="2" name="四角形: 角を丸くする 1">
-              <a:extLst>
-                <a:ext uri="{FF2B5EF4-FFF2-40B4-BE49-F238E27FC236}">
-                  <a16:creationId xmlns:a16="http://schemas.microsoft.com/office/drawing/2014/main" id="{6C7F1EF0-13C4-8CF4-9690-651CD77F07D2}"/>
-                </a:ext>
-              </a:extLst>
-            </p:cNvPr>
-            <p:cNvSpPr/>
-            <p:nvPr/>
-          </p:nvSpPr>
-          <p:spPr>
-            <a:xfrm>
-              <a:off x="503232" y="1154293"/>
+              <a:off x="463827" y="1154293"/>
               <a:ext cx="2694569" cy="1549799"/>
             </a:xfrm>
             <a:prstGeom prst="roundRect">
@@ -4622,7 +4650,7 @@
           </p:blipFill>
           <p:spPr>
             <a:xfrm>
-              <a:off x="644032" y="1009460"/>
+              <a:off x="604627" y="1009460"/>
               <a:ext cx="1079379" cy="1215157"/>
             </a:xfrm>
             <a:prstGeom prst="rect">
@@ -4644,7 +4672,7 @@
           </p:nvSpPr>
           <p:spPr>
             <a:xfrm>
-              <a:off x="1671217" y="1305997"/>
+              <a:off x="1631812" y="1305997"/>
               <a:ext cx="1661137" cy="610167"/>
             </a:xfrm>
             <a:prstGeom prst="rect">
@@ -4708,7 +4736,7 @@
           </p:nvSpPr>
           <p:spPr>
             <a:xfrm>
-              <a:off x="713496" y="1983073"/>
+              <a:off x="674091" y="1983073"/>
               <a:ext cx="968831" cy="610167"/>
             </a:xfrm>
             <a:prstGeom prst="rect">
@@ -4768,7 +4796,7 @@
           </p:nvSpPr>
           <p:spPr>
             <a:xfrm>
-              <a:off x="498261" y="2850872"/>
+              <a:off x="458856" y="2850872"/>
               <a:ext cx="2694569" cy="1097863"/>
             </a:xfrm>
             <a:prstGeom prst="roundRect">
@@ -4840,7 +4868,7 @@
           </p:blipFill>
           <p:spPr>
             <a:xfrm>
-              <a:off x="672071" y="2922235"/>
+              <a:off x="632666" y="2922235"/>
               <a:ext cx="899785" cy="919049"/>
             </a:xfrm>
             <a:prstGeom prst="rect">
@@ -4848,99 +4876,78 @@
             </a:prstGeom>
           </p:spPr>
         </p:pic>
-        <p:grpSp>
-          <p:nvGrpSpPr>
-            <p:cNvPr id="51" name="グループ化 50">
-              <a:extLst>
-                <a:ext uri="{FF2B5EF4-FFF2-40B4-BE49-F238E27FC236}">
-                  <a16:creationId xmlns:a16="http://schemas.microsoft.com/office/drawing/2014/main" id="{53D53D6F-BA6A-A893-09E4-B351E1462436}"/>
-                </a:ext>
-              </a:extLst>
-            </p:cNvPr>
-            <p:cNvGrpSpPr/>
-            <p:nvPr/>
-          </p:nvGrpSpPr>
-          <p:grpSpPr>
-            <a:xfrm>
-              <a:off x="882422" y="3236290"/>
-              <a:ext cx="480114" cy="444491"/>
-              <a:chOff x="789711" y="2943782"/>
-              <a:chExt cx="641396" cy="530005"/>
-            </a:xfrm>
-          </p:grpSpPr>
-          <p:pic>
-            <p:nvPicPr>
-              <p:cNvPr id="48" name="グラフィックス 47" descr="矢印: 反時計回りの曲線 単色塗りつぶし">
-                <a:extLst>
-                  <a:ext uri="{FF2B5EF4-FFF2-40B4-BE49-F238E27FC236}">
-                    <a16:creationId xmlns:a16="http://schemas.microsoft.com/office/drawing/2014/main" id="{729BDC3D-4405-1256-63B4-EA7892614EEE}"/>
-                  </a:ext>
-                </a:extLst>
-              </p:cNvPr>
-              <p:cNvPicPr>
-                <a:picLocks noChangeAspect="1"/>
-              </p:cNvPicPr>
-              <p:nvPr/>
-            </p:nvPicPr>
-            <p:blipFill>
-              <a:blip r:embed="rId7">
-                <a:extLst>
-                  <a:ext uri="{96DAC541-7B7A-43D3-8B79-37D633B846F1}">
-                    <asvg:svgBlip xmlns:asvg="http://schemas.microsoft.com/office/drawing/2016/SVG/main" r:embed="rId8"/>
-                  </a:ext>
-                </a:extLst>
-              </a:blip>
-              <a:stretch>
-                <a:fillRect/>
-              </a:stretch>
-            </p:blipFill>
-            <p:spPr>
-              <a:xfrm rot="17376736">
-                <a:off x="867720" y="2865773"/>
-                <a:ext cx="451321" cy="607340"/>
-              </a:xfrm>
-              <a:prstGeom prst="rect">
-                <a:avLst/>
-              </a:prstGeom>
-            </p:spPr>
-          </p:pic>
-          <p:pic>
-            <p:nvPicPr>
-              <p:cNvPr id="49" name="グラフィックス 48" descr="矢印: 反時計回りの曲線 単色塗りつぶし">
-                <a:extLst>
-                  <a:ext uri="{FF2B5EF4-FFF2-40B4-BE49-F238E27FC236}">
-                    <a16:creationId xmlns:a16="http://schemas.microsoft.com/office/drawing/2014/main" id="{398E03FA-B7A0-BC26-99BB-DD526A6248A7}"/>
-                  </a:ext>
-                </a:extLst>
-              </p:cNvPr>
-              <p:cNvPicPr>
-                <a:picLocks noChangeAspect="1"/>
-              </p:cNvPicPr>
-              <p:nvPr/>
-            </p:nvPicPr>
-            <p:blipFill>
-              <a:blip r:embed="rId7">
-                <a:extLst>
-                  <a:ext uri="{96DAC541-7B7A-43D3-8B79-37D633B846F1}">
-                    <asvg:svgBlip xmlns:asvg="http://schemas.microsoft.com/office/drawing/2016/SVG/main" r:embed="rId8"/>
-                  </a:ext>
-                </a:extLst>
-              </a:blip>
-              <a:stretch>
-                <a:fillRect/>
-              </a:stretch>
-            </p:blipFill>
-            <p:spPr>
-              <a:xfrm rot="6212480">
-                <a:off x="928411" y="2971090"/>
-                <a:ext cx="398052" cy="607341"/>
-              </a:xfrm>
-              <a:prstGeom prst="rect">
-                <a:avLst/>
-              </a:prstGeom>
-            </p:spPr>
-          </p:pic>
-        </p:grpSp>
+        <p:pic>
+          <p:nvPicPr>
+            <p:cNvPr id="48" name="グラフィックス 47" descr="矢印: 反時計回りの曲線 単色塗りつぶし">
+              <a:extLst>
+                <a:ext uri="{FF2B5EF4-FFF2-40B4-BE49-F238E27FC236}">
+                  <a16:creationId xmlns:a16="http://schemas.microsoft.com/office/drawing/2014/main" id="{729BDC3D-4405-1256-63B4-EA7892614EEE}"/>
+                </a:ext>
+              </a:extLst>
+            </p:cNvPr>
+            <p:cNvPicPr>
+              <a:picLocks noChangeAspect="1"/>
+            </p:cNvPicPr>
+            <p:nvPr/>
+          </p:nvPicPr>
+          <p:blipFill>
+            <a:blip r:embed="rId7">
+              <a:extLst>
+                <a:ext uri="{96DAC541-7B7A-43D3-8B79-37D633B846F1}">
+                  <asvg:svgBlip xmlns:asvg="http://schemas.microsoft.com/office/drawing/2016/SVG/main" r:embed="rId8"/>
+                </a:ext>
+              </a:extLst>
+            </a:blip>
+            <a:stretch>
+              <a:fillRect/>
+            </a:stretch>
+          </p:blipFill>
+          <p:spPr>
+            <a:xfrm rot="17376736">
+              <a:off x="881076" y="3198231"/>
+              <a:ext cx="378502" cy="454622"/>
+            </a:xfrm>
+            <a:prstGeom prst="rect">
+              <a:avLst/>
+            </a:prstGeom>
+          </p:spPr>
+        </p:pic>
+        <p:pic>
+          <p:nvPicPr>
+            <p:cNvPr id="49" name="グラフィックス 48" descr="矢印: 反時計回りの曲線 単色塗りつぶし">
+              <a:extLst>
+                <a:ext uri="{FF2B5EF4-FFF2-40B4-BE49-F238E27FC236}">
+                  <a16:creationId xmlns:a16="http://schemas.microsoft.com/office/drawing/2014/main" id="{398E03FA-B7A0-BC26-99BB-DD526A6248A7}"/>
+                </a:ext>
+              </a:extLst>
+            </p:cNvPr>
+            <p:cNvPicPr>
+              <a:picLocks noChangeAspect="1"/>
+            </p:cNvPicPr>
+            <p:nvPr/>
+          </p:nvPicPr>
+          <p:blipFill>
+            <a:blip r:embed="rId7">
+              <a:extLst>
+                <a:ext uri="{96DAC541-7B7A-43D3-8B79-37D633B846F1}">
+                  <asvg:svgBlip xmlns:asvg="http://schemas.microsoft.com/office/drawing/2016/SVG/main" r:embed="rId8"/>
+                </a:ext>
+              </a:extLst>
+            </a:blip>
+            <a:stretch>
+              <a:fillRect/>
+            </a:stretch>
+          </p:blipFill>
+          <p:spPr>
+            <a:xfrm rot="6212480">
+              <a:off x="928906" y="3286555"/>
+              <a:ext cx="333828" cy="454622"/>
+            </a:xfrm>
+            <a:prstGeom prst="rect">
+              <a:avLst/>
+            </a:prstGeom>
+          </p:spPr>
+        </p:pic>
         <p:sp>
           <p:nvSpPr>
             <p:cNvPr id="50" name="テキスト ボックス 49">
@@ -4955,7 +4962,7 @@
           </p:nvSpPr>
           <p:spPr>
             <a:xfrm>
-              <a:off x="1349832" y="3103557"/>
+              <a:off x="1310427" y="3103557"/>
               <a:ext cx="1943377" cy="610167"/>
             </a:xfrm>
             <a:prstGeom prst="rect">
@@ -5024,7 +5031,7 @@
           </p:nvSpPr>
           <p:spPr>
             <a:xfrm>
-              <a:off x="505459" y="4097221"/>
+              <a:off x="466054" y="4097221"/>
               <a:ext cx="2694569" cy="1323578"/>
             </a:xfrm>
             <a:prstGeom prst="roundRect">
@@ -5096,7 +5103,7 @@
           </p:blipFill>
           <p:spPr>
             <a:xfrm>
-              <a:off x="682440" y="4128197"/>
+              <a:off x="643035" y="4128197"/>
               <a:ext cx="890051" cy="890051"/>
             </a:xfrm>
             <a:prstGeom prst="rect">
@@ -5132,7 +5139,7 @@
           </p:blipFill>
           <p:spPr>
             <a:xfrm>
-              <a:off x="2064782" y="4109064"/>
+              <a:off x="2025377" y="4109064"/>
               <a:ext cx="1017312" cy="1017312"/>
             </a:xfrm>
             <a:prstGeom prst="rect">
@@ -5154,7 +5161,7 @@
           </p:nvSpPr>
           <p:spPr>
             <a:xfrm>
-              <a:off x="593012" y="4972817"/>
+              <a:off x="553607" y="4972817"/>
               <a:ext cx="1076146" cy="365537"/>
             </a:xfrm>
             <a:prstGeom prst="roundRect">
@@ -5229,7 +5236,7 @@
           </p:nvSpPr>
           <p:spPr>
             <a:xfrm>
-              <a:off x="2004166" y="4967253"/>
+              <a:off x="1964761" y="4967253"/>
               <a:ext cx="1138544" cy="365537"/>
             </a:xfrm>
             <a:prstGeom prst="roundRect">
@@ -5319,7 +5326,7 @@
           </p:nvCxnSpPr>
           <p:spPr>
             <a:xfrm>
-              <a:off x="2269089" y="4626610"/>
+              <a:off x="2229684" y="4626610"/>
               <a:ext cx="706052" cy="0"/>
             </a:xfrm>
             <a:prstGeom prst="line">
@@ -5363,7 +5370,7 @@
           </p:nvCxnSpPr>
           <p:spPr>
             <a:xfrm>
-              <a:off x="2206072" y="4687570"/>
+              <a:off x="2166667" y="4687570"/>
               <a:ext cx="706052" cy="0"/>
             </a:xfrm>
             <a:prstGeom prst="line">
@@ -5407,7 +5414,7 @@
           </p:nvCxnSpPr>
           <p:spPr>
             <a:xfrm>
-              <a:off x="1646315" y="4664749"/>
+              <a:off x="1606910" y="4664749"/>
               <a:ext cx="355600" cy="0"/>
             </a:xfrm>
             <a:prstGeom prst="straightConnector1">
@@ -5451,7 +5458,7 @@
           </p:nvSpPr>
           <p:spPr>
             <a:xfrm>
-              <a:off x="505522" y="5564279"/>
+              <a:off x="466117" y="5564279"/>
               <a:ext cx="2694569" cy="970054"/>
             </a:xfrm>
             <a:prstGeom prst="roundRect">
@@ -5523,7 +5530,7 @@
           </p:blipFill>
           <p:spPr>
             <a:xfrm>
-              <a:off x="679690" y="5587538"/>
+              <a:off x="640285" y="5587538"/>
               <a:ext cx="899785" cy="919049"/>
             </a:xfrm>
             <a:prstGeom prst="rect">
@@ -5545,7 +5552,7 @@
           </p:nvSpPr>
           <p:spPr>
             <a:xfrm>
-              <a:off x="1406806" y="5756513"/>
+              <a:off x="1367401" y="5756513"/>
               <a:ext cx="1660294" cy="610167"/>
             </a:xfrm>
             <a:prstGeom prst="rect">
@@ -5598,7 +5605,7 @@
           </p:nvSpPr>
           <p:spPr>
             <a:xfrm>
-              <a:off x="911651" y="5841852"/>
+              <a:off x="872246" y="5841852"/>
               <a:ext cx="420623" cy="523220"/>
             </a:xfrm>
             <a:prstGeom prst="rect">
@@ -5623,50 +5630,6 @@
             </a:p>
           </p:txBody>
         </p:sp>
-        <p:cxnSp>
-          <p:nvCxnSpPr>
-            <p:cNvPr id="72" name="直線矢印コネクタ 71">
-              <a:extLst>
-                <a:ext uri="{FF2B5EF4-FFF2-40B4-BE49-F238E27FC236}">
-                  <a16:creationId xmlns:a16="http://schemas.microsoft.com/office/drawing/2014/main" id="{1CC2F722-7067-8B6A-4567-A8D074E84883}"/>
-                </a:ext>
-              </a:extLst>
-            </p:cNvPr>
-            <p:cNvCxnSpPr>
-              <a:cxnSpLocks/>
-            </p:cNvCxnSpPr>
-            <p:nvPr/>
-          </p:nvCxnSpPr>
-          <p:spPr>
-            <a:xfrm>
-              <a:off x="3207648" y="1949412"/>
-              <a:ext cx="861305" cy="0"/>
-            </a:xfrm>
-            <a:prstGeom prst="straightConnector1">
-              <a:avLst/>
-            </a:prstGeom>
-            <a:ln w="76200">
-              <a:solidFill>
-                <a:schemeClr val="tx1"/>
-              </a:solidFill>
-              <a:tailEnd type="triangle" w="med" len="sm"/>
-            </a:ln>
-          </p:spPr>
-          <p:style>
-            <a:lnRef idx="2">
-              <a:schemeClr val="accent1"/>
-            </a:lnRef>
-            <a:fillRef idx="0">
-              <a:schemeClr val="accent1"/>
-            </a:fillRef>
-            <a:effectRef idx="1">
-              <a:schemeClr val="accent1"/>
-            </a:effectRef>
-            <a:fontRef idx="minor">
-              <a:schemeClr val="tx1"/>
-            </a:fontRef>
-          </p:style>
-        </p:cxnSp>
         <p:sp>
           <p:nvSpPr>
             <p:cNvPr id="76" name="四角形: 角を丸くする 75">
@@ -5681,7 +5644,7 @@
           </p:nvSpPr>
           <p:spPr>
             <a:xfrm>
-              <a:off x="4145848" y="1017300"/>
+              <a:off x="4106443" y="1017300"/>
               <a:ext cx="1861652" cy="1868139"/>
             </a:xfrm>
             <a:prstGeom prst="roundRect">
@@ -5689,12 +5652,14 @@
                 <a:gd name="adj" fmla="val 13218"/>
               </a:avLst>
             </a:prstGeom>
-            <a:noFill/>
+            <a:solidFill>
+              <a:schemeClr val="bg1"/>
+            </a:solidFill>
             <a:ln w="57150" cap="rnd">
               <a:solidFill>
                 <a:schemeClr val="tx1"/>
               </a:solidFill>
-              <a:prstDash val="dash"/>
+              <a:prstDash val="sysDash"/>
               <a:miter lim="800000"/>
             </a:ln>
           </p:spPr>
@@ -5741,7 +5706,7 @@
           </p:nvSpPr>
           <p:spPr>
             <a:xfrm>
-              <a:off x="4364931" y="2293748"/>
+              <a:off x="4325526" y="2293748"/>
               <a:ext cx="889207" cy="438296"/>
             </a:xfrm>
             <a:prstGeom prst="rect">
@@ -5788,7 +5753,7 @@
           </p:nvSpPr>
           <p:spPr>
             <a:xfrm>
-              <a:off x="4922638" y="1765949"/>
+              <a:off x="4883233" y="1765949"/>
               <a:ext cx="889207" cy="438296"/>
             </a:xfrm>
             <a:prstGeom prst="rect">
@@ -5849,7 +5814,7 @@
           </p:blipFill>
           <p:spPr>
             <a:xfrm>
-              <a:off x="4958314" y="1788350"/>
+              <a:off x="4918909" y="1788350"/>
               <a:ext cx="389271" cy="389271"/>
             </a:xfrm>
             <a:prstGeom prst="rect">
@@ -5885,7 +5850,7 @@
           </p:blipFill>
           <p:spPr>
             <a:xfrm>
-              <a:off x="5371750" y="1790889"/>
+              <a:off x="5332345" y="1790889"/>
               <a:ext cx="389271" cy="389271"/>
             </a:xfrm>
             <a:prstGeom prst="rect">
@@ -5909,7 +5874,7 @@
           </p:nvCxnSpPr>
           <p:spPr>
             <a:xfrm>
-              <a:off x="4401126" y="2588183"/>
+              <a:off x="4361721" y="2588183"/>
               <a:ext cx="91440" cy="0"/>
             </a:xfrm>
             <a:prstGeom prst="line">
@@ -5952,7 +5917,7 @@
           </p:nvCxnSpPr>
           <p:spPr>
             <a:xfrm>
-              <a:off x="4488756" y="2551988"/>
+              <a:off x="4449351" y="2551988"/>
               <a:ext cx="91440" cy="0"/>
             </a:xfrm>
             <a:prstGeom prst="line">
@@ -5995,7 +5960,7 @@
           </p:nvCxnSpPr>
           <p:spPr>
             <a:xfrm>
-              <a:off x="4580196" y="2508452"/>
+              <a:off x="4540791" y="2508452"/>
               <a:ext cx="91440" cy="0"/>
             </a:xfrm>
             <a:prstGeom prst="line">
@@ -6038,7 +6003,7 @@
           </p:nvCxnSpPr>
           <p:spPr>
             <a:xfrm>
-              <a:off x="4673541" y="2477768"/>
+              <a:off x="4634136" y="2477768"/>
               <a:ext cx="91440" cy="0"/>
             </a:xfrm>
             <a:prstGeom prst="line">
@@ -6081,7 +6046,7 @@
           </p:nvCxnSpPr>
           <p:spPr>
             <a:xfrm>
-              <a:off x="4762453" y="2450491"/>
+              <a:off x="4723048" y="2450491"/>
               <a:ext cx="91440" cy="0"/>
             </a:xfrm>
             <a:prstGeom prst="line">
@@ -6124,7 +6089,7 @@
           </p:nvCxnSpPr>
           <p:spPr>
             <a:xfrm>
-              <a:off x="4673541" y="2588183"/>
+              <a:off x="4634136" y="2588183"/>
               <a:ext cx="91440" cy="0"/>
             </a:xfrm>
             <a:prstGeom prst="line">
@@ -6167,7 +6132,7 @@
           </p:nvCxnSpPr>
           <p:spPr>
             <a:xfrm>
-              <a:off x="4853893" y="2588183"/>
+              <a:off x="4814488" y="2588183"/>
               <a:ext cx="91440" cy="0"/>
             </a:xfrm>
             <a:prstGeom prst="line">
@@ -6210,7 +6175,7 @@
           </p:nvCxnSpPr>
           <p:spPr>
             <a:xfrm>
-              <a:off x="4762453" y="2532975"/>
+              <a:off x="4723048" y="2532975"/>
               <a:ext cx="91440" cy="0"/>
             </a:xfrm>
             <a:prstGeom prst="line">
@@ -6253,7 +6218,7 @@
           </p:nvCxnSpPr>
           <p:spPr>
             <a:xfrm>
-              <a:off x="4945333" y="2413310"/>
+              <a:off x="4905928" y="2413310"/>
               <a:ext cx="91440" cy="0"/>
             </a:xfrm>
             <a:prstGeom prst="line">
@@ -6296,7 +6261,7 @@
           </p:nvCxnSpPr>
           <p:spPr>
             <a:xfrm>
-              <a:off x="4853893" y="2499963"/>
+              <a:off x="4814488" y="2499963"/>
               <a:ext cx="91440" cy="0"/>
             </a:xfrm>
             <a:prstGeom prst="line">
@@ -6339,7 +6304,7 @@
           </p:nvCxnSpPr>
           <p:spPr>
             <a:xfrm>
-              <a:off x="4401126" y="2425019"/>
+              <a:off x="4361721" y="2425019"/>
               <a:ext cx="91440" cy="0"/>
             </a:xfrm>
             <a:prstGeom prst="line">
@@ -6382,7 +6347,7 @@
           </p:nvCxnSpPr>
           <p:spPr>
             <a:xfrm>
-              <a:off x="5035956" y="2508452"/>
+              <a:off x="4996551" y="2508452"/>
               <a:ext cx="91440" cy="0"/>
             </a:xfrm>
             <a:prstGeom prst="line">
@@ -6425,7 +6390,7 @@
           </p:nvCxnSpPr>
           <p:spPr>
             <a:xfrm>
-              <a:off x="5133734" y="2588183"/>
+              <a:off x="5094329" y="2588183"/>
               <a:ext cx="91440" cy="0"/>
             </a:xfrm>
             <a:prstGeom prst="line">
@@ -6468,7 +6433,7 @@
           </p:nvCxnSpPr>
           <p:spPr>
             <a:xfrm>
-              <a:off x="4945333" y="2537617"/>
+              <a:off x="4905928" y="2537617"/>
               <a:ext cx="91440" cy="0"/>
             </a:xfrm>
             <a:prstGeom prst="line">
@@ -6509,7 +6474,7 @@
           </p:nvSpPr>
           <p:spPr>
             <a:xfrm>
-              <a:off x="4196571" y="1130014"/>
+              <a:off x="4157166" y="1130014"/>
               <a:ext cx="1861649" cy="523220"/>
             </a:xfrm>
             <a:prstGeom prst="rect">
@@ -6553,7 +6518,7 @@
           </p:nvCxnSpPr>
           <p:spPr>
             <a:xfrm>
-              <a:off x="1646315" y="2043735"/>
+              <a:off x="1606910" y="2043735"/>
               <a:ext cx="483336" cy="0"/>
             </a:xfrm>
             <a:prstGeom prst="line">
@@ -6596,7 +6561,7 @@
           </p:nvCxnSpPr>
           <p:spPr>
             <a:xfrm>
-              <a:off x="2428788" y="2169465"/>
+              <a:off x="2389383" y="2169465"/>
               <a:ext cx="483336" cy="0"/>
             </a:xfrm>
             <a:prstGeom prst="line">
@@ -6639,7 +6604,7 @@
           </p:nvCxnSpPr>
           <p:spPr>
             <a:xfrm>
-              <a:off x="2037659" y="2284066"/>
+              <a:off x="1998254" y="2284066"/>
               <a:ext cx="304685" cy="0"/>
             </a:xfrm>
             <a:prstGeom prst="line">
@@ -6682,7 +6647,7 @@
           </p:nvCxnSpPr>
           <p:spPr>
             <a:xfrm>
-              <a:off x="2502479" y="2401177"/>
+              <a:off x="2463074" y="2401177"/>
               <a:ext cx="304685" cy="0"/>
             </a:xfrm>
             <a:prstGeom prst="line">
@@ -6725,7 +6690,7 @@
           </p:nvCxnSpPr>
           <p:spPr>
             <a:xfrm>
-              <a:off x="1765300" y="2516452"/>
+              <a:off x="1725895" y="2516452"/>
               <a:ext cx="474980" cy="0"/>
             </a:xfrm>
             <a:prstGeom prst="line">
@@ -6768,7 +6733,7 @@
           </p:nvCxnSpPr>
           <p:spPr>
             <a:xfrm>
-              <a:off x="6095999" y="1957262"/>
+              <a:off x="6056594" y="1957262"/>
               <a:ext cx="1171576" cy="0"/>
             </a:xfrm>
             <a:prstGeom prst="straightConnector1">
@@ -6810,7 +6775,7 @@
           </p:nvSpPr>
           <p:spPr>
             <a:xfrm>
-              <a:off x="7335988" y="632230"/>
+              <a:off x="7296583" y="632230"/>
               <a:ext cx="4142516" cy="2663051"/>
             </a:xfrm>
             <a:prstGeom prst="roundRect">
@@ -6818,7 +6783,9 @@
                 <a:gd name="adj" fmla="val 3359"/>
               </a:avLst>
             </a:prstGeom>
-            <a:noFill/>
+            <a:solidFill>
+              <a:schemeClr val="bg1"/>
+            </a:solidFill>
             <a:ln w="57150">
               <a:solidFill>
                 <a:schemeClr val="tx1"/>
@@ -6868,8 +6835,8 @@
           </p:nvSpPr>
           <p:spPr>
             <a:xfrm>
-              <a:off x="679690" y="670022"/>
-              <a:ext cx="980860" cy="214255"/>
+              <a:off x="269226" y="462862"/>
+              <a:ext cx="1258489" cy="294265"/>
             </a:xfrm>
             <a:prstGeom prst="roundRect">
               <a:avLst>
@@ -6903,17 +6870,21 @@
             <a:p>
               <a:pPr algn="ctr"/>
               <a:r>
-                <a:rPr lang="ja-JP" altLang="en-US" sz="1600" b="1" dirty="0">
+                <a:rPr lang="ja-JP" altLang="en-US" sz="2400" dirty="0">
                   <a:solidFill>
                     <a:schemeClr val="tx1"/>
                   </a:solidFill>
+                  <a:latin typeface="モボ-SemiBold" panose="02000700000000000000" pitchFamily="50" charset="-128"/>
+                  <a:ea typeface="モボ-SemiBold" panose="02000700000000000000" pitchFamily="50" charset="-128"/>
                 </a:rPr>
                 <a:t>ユーザ</a:t>
               </a:r>
-              <a:endParaRPr lang="ja-JP" altLang="en-US" sz="1400" dirty="0">
+              <a:endParaRPr lang="ja-JP" altLang="en-US" sz="2000" dirty="0">
                 <a:solidFill>
                   <a:schemeClr val="tx1"/>
                 </a:solidFill>
+                <a:latin typeface="モボ-SemiBold" panose="02000700000000000000" pitchFamily="50" charset="-128"/>
+                <a:ea typeface="モボ-SemiBold" panose="02000700000000000000" pitchFamily="50" charset="-128"/>
               </a:endParaRPr>
             </a:p>
           </p:txBody>
@@ -6946,8 +6917,8 @@
           </p:blipFill>
           <p:spPr>
             <a:xfrm>
-              <a:off x="1476798" y="419423"/>
-              <a:ext cx="736276" cy="734776"/>
+              <a:off x="1279119" y="77019"/>
+              <a:ext cx="1079379" cy="1077180"/>
             </a:xfrm>
             <a:prstGeom prst="rect">
               <a:avLst/>
@@ -6970,8 +6941,8 @@
           </p:nvCxnSpPr>
           <p:spPr>
             <a:xfrm>
-              <a:off x="1844936" y="1055370"/>
-              <a:ext cx="0" cy="98923"/>
+              <a:off x="1805531" y="853440"/>
+              <a:ext cx="0" cy="300853"/>
             </a:xfrm>
             <a:prstGeom prst="line">
               <a:avLst/>
@@ -7013,7 +6984,7 @@
           </p:nvCxnSpPr>
           <p:spPr>
             <a:xfrm>
-              <a:off x="1856687" y="2704092"/>
+              <a:off x="1817282" y="2704092"/>
               <a:ext cx="0" cy="144833"/>
             </a:xfrm>
             <a:prstGeom prst="line">
@@ -7056,7 +7027,7 @@
           </p:nvCxnSpPr>
           <p:spPr>
             <a:xfrm>
-              <a:off x="1862342" y="3948735"/>
+              <a:off x="1822937" y="3948735"/>
               <a:ext cx="0" cy="144833"/>
             </a:xfrm>
             <a:prstGeom prst="line">
@@ -7099,7 +7070,7 @@
           </p:nvCxnSpPr>
           <p:spPr>
             <a:xfrm>
-              <a:off x="1886506" y="5420799"/>
+              <a:off x="1847101" y="5420799"/>
               <a:ext cx="0" cy="144833"/>
             </a:xfrm>
             <a:prstGeom prst="line">
@@ -7126,50 +7097,6 @@
             </a:fontRef>
           </p:style>
         </p:cxnSp>
-        <p:cxnSp>
-          <p:nvCxnSpPr>
-            <p:cNvPr id="154" name="直線矢印コネクタ 153">
-              <a:extLst>
-                <a:ext uri="{FF2B5EF4-FFF2-40B4-BE49-F238E27FC236}">
-                  <a16:creationId xmlns:a16="http://schemas.microsoft.com/office/drawing/2014/main" id="{9DC5BA02-A8F4-CA5C-4145-FC0B19F733F7}"/>
-                </a:ext>
-              </a:extLst>
-            </p:cNvPr>
-            <p:cNvCxnSpPr>
-              <a:cxnSpLocks/>
-            </p:cNvCxnSpPr>
-            <p:nvPr/>
-          </p:nvCxnSpPr>
-          <p:spPr>
-            <a:xfrm>
-              <a:off x="2206072" y="825985"/>
-              <a:ext cx="4261775" cy="0"/>
-            </a:xfrm>
-            <a:prstGeom prst="straightConnector1">
-              <a:avLst/>
-            </a:prstGeom>
-            <a:ln w="76200">
-              <a:solidFill>
-                <a:schemeClr val="tx1"/>
-              </a:solidFill>
-              <a:tailEnd type="none" w="med" len="sm"/>
-            </a:ln>
-          </p:spPr>
-          <p:style>
-            <a:lnRef idx="2">
-              <a:schemeClr val="accent1"/>
-            </a:lnRef>
-            <a:fillRef idx="0">
-              <a:schemeClr val="accent1"/>
-            </a:fillRef>
-            <a:effectRef idx="1">
-              <a:schemeClr val="accent1"/>
-            </a:effectRef>
-            <a:fontRef idx="minor">
-              <a:schemeClr val="tx1"/>
-            </a:fontRef>
-          </p:style>
-        </p:cxnSp>
         <p:sp>
           <p:nvSpPr>
             <p:cNvPr id="156" name="テキスト ボックス 155">
@@ -7184,8 +7111,8 @@
           </p:nvSpPr>
           <p:spPr>
             <a:xfrm>
-              <a:off x="2143050" y="491130"/>
-              <a:ext cx="1258490" cy="307777"/>
+              <a:off x="2045769" y="421680"/>
+              <a:ext cx="1577105" cy="338554"/>
             </a:xfrm>
             <a:prstGeom prst="rect">
               <a:avLst/>
@@ -7199,7 +7126,7 @@
             <a:lstStyle/>
             <a:p>
               <a:r>
-                <a:rPr kumimoji="1" lang="ja-JP" altLang="en-US" sz="1400" dirty="0"/>
+                <a:rPr kumimoji="1" lang="ja-JP" altLang="en-US" sz="1600" dirty="0"/>
                 <a:t>マウス操作等</a:t>
               </a:r>
             </a:p>
@@ -7219,7 +7146,7 @@
           </p:nvSpPr>
           <p:spPr>
             <a:xfrm>
-              <a:off x="4267090" y="478343"/>
+              <a:off x="4227685" y="478343"/>
               <a:ext cx="1626329" cy="307777"/>
             </a:xfrm>
             <a:prstGeom prst="rect">
@@ -7257,8 +7184,8 @@
           </p:nvCxnSpPr>
           <p:spPr>
             <a:xfrm>
-              <a:off x="3663452" y="3068243"/>
-              <a:ext cx="2804395" cy="12927"/>
+              <a:off x="3624047" y="3068243"/>
+              <a:ext cx="2765484" cy="6463"/>
             </a:xfrm>
             <a:prstGeom prst="straightConnector1">
               <a:avLst/>
@@ -7301,7 +7228,7 @@
           </p:nvCxnSpPr>
           <p:spPr>
             <a:xfrm>
-              <a:off x="3700032" y="3030855"/>
+              <a:off x="3660627" y="3030855"/>
               <a:ext cx="0" cy="408022"/>
             </a:xfrm>
             <a:prstGeom prst="line">
@@ -7328,49 +7255,6 @@
             </a:fontRef>
           </p:style>
         </p:cxnSp>
-        <p:cxnSp>
-          <p:nvCxnSpPr>
-            <p:cNvPr id="167" name="直線コネクタ 166">
-              <a:extLst>
-                <a:ext uri="{FF2B5EF4-FFF2-40B4-BE49-F238E27FC236}">
-                  <a16:creationId xmlns:a16="http://schemas.microsoft.com/office/drawing/2014/main" id="{FC0E2071-A865-F3A3-1C3D-B5F56D8C7C66}"/>
-                </a:ext>
-              </a:extLst>
-            </p:cNvPr>
-            <p:cNvCxnSpPr>
-              <a:cxnSpLocks/>
-            </p:cNvCxnSpPr>
-            <p:nvPr/>
-          </p:nvCxnSpPr>
-          <p:spPr>
-            <a:xfrm>
-              <a:off x="3203786" y="3399859"/>
-              <a:ext cx="528109" cy="0"/>
-            </a:xfrm>
-            <a:prstGeom prst="line">
-              <a:avLst/>
-            </a:prstGeom>
-            <a:ln w="76200">
-              <a:solidFill>
-                <a:schemeClr val="tx1"/>
-              </a:solidFill>
-            </a:ln>
-          </p:spPr>
-          <p:style>
-            <a:lnRef idx="2">
-              <a:schemeClr val="accent1"/>
-            </a:lnRef>
-            <a:fillRef idx="0">
-              <a:schemeClr val="accent1"/>
-            </a:fillRef>
-            <a:effectRef idx="1">
-              <a:schemeClr val="accent1"/>
-            </a:effectRef>
-            <a:fontRef idx="minor">
-              <a:schemeClr val="tx1"/>
-            </a:fontRef>
-          </p:style>
-        </p:cxnSp>
         <p:sp>
           <p:nvSpPr>
             <p:cNvPr id="174" name="テキスト ボックス 173">
@@ -7385,7 +7269,7 @@
           </p:nvSpPr>
           <p:spPr>
             <a:xfrm>
-              <a:off x="3590437" y="3126856"/>
+              <a:off x="3551032" y="3126856"/>
               <a:ext cx="2392043" cy="307777"/>
             </a:xfrm>
             <a:prstGeom prst="rect">
@@ -7423,7 +7307,7 @@
           </p:nvCxnSpPr>
           <p:spPr>
             <a:xfrm>
-              <a:off x="7335988" y="1009460"/>
+              <a:off x="7296583" y="1009460"/>
               <a:ext cx="4142515" cy="0"/>
             </a:xfrm>
             <a:prstGeom prst="straightConnector1">
@@ -7479,7 +7363,7 @@
           </p:blipFill>
           <p:spPr>
             <a:xfrm>
-              <a:off x="8130831" y="667481"/>
+              <a:off x="8091426" y="667481"/>
               <a:ext cx="337532" cy="302704"/>
             </a:xfrm>
             <a:prstGeom prst="rect">
@@ -7501,7 +7385,7 @@
           </p:nvSpPr>
           <p:spPr>
             <a:xfrm>
-              <a:off x="8519275" y="711201"/>
+              <a:off x="8479870" y="711201"/>
               <a:ext cx="236107" cy="229812"/>
             </a:xfrm>
             <a:prstGeom prst="ellipse">
@@ -7567,7 +7451,7 @@
           </p:blipFill>
           <p:spPr>
             <a:xfrm rot="20190343" flipH="1">
-              <a:off x="8844949" y="671431"/>
+              <a:off x="8805544" y="671431"/>
               <a:ext cx="306059" cy="309105"/>
             </a:xfrm>
             <a:prstGeom prst="rect">
@@ -7603,7 +7487,7 @@
           </p:blipFill>
           <p:spPr>
             <a:xfrm flipH="1">
-              <a:off x="7802094" y="670230"/>
+              <a:off x="7762689" y="670230"/>
               <a:ext cx="273958" cy="307615"/>
             </a:xfrm>
             <a:prstGeom prst="rect">
@@ -7627,7 +7511,7 @@
           </p:nvCxnSpPr>
           <p:spPr>
             <a:xfrm>
-              <a:off x="7835900" y="706121"/>
+              <a:off x="7796495" y="706121"/>
               <a:ext cx="0" cy="229812"/>
             </a:xfrm>
             <a:prstGeom prst="line">
@@ -7670,7 +7554,7 @@
           </p:nvCxnSpPr>
           <p:spPr>
             <a:xfrm flipH="1">
-              <a:off x="7455218" y="731305"/>
+              <a:off x="7415813" y="731305"/>
               <a:ext cx="215265" cy="0"/>
             </a:xfrm>
             <a:prstGeom prst="line">
@@ -7713,7 +7597,7 @@
           </p:nvCxnSpPr>
           <p:spPr>
             <a:xfrm flipH="1">
-              <a:off x="7458075" y="818833"/>
+              <a:off x="7418670" y="818833"/>
               <a:ext cx="212408" cy="289"/>
             </a:xfrm>
             <a:prstGeom prst="line">
@@ -7756,7 +7640,7 @@
           </p:nvCxnSpPr>
           <p:spPr>
             <a:xfrm flipH="1">
-              <a:off x="7458075" y="906837"/>
+              <a:off x="7418670" y="906837"/>
               <a:ext cx="212408" cy="0"/>
             </a:xfrm>
             <a:prstGeom prst="line">
@@ -7799,7 +7683,7 @@
           </p:nvCxnSpPr>
           <p:spPr>
             <a:xfrm>
-              <a:off x="9266220" y="645962"/>
+              <a:off x="9226815" y="645962"/>
               <a:ext cx="0" cy="371338"/>
             </a:xfrm>
             <a:prstGeom prst="straightConnector1">
@@ -7843,7 +7727,7 @@
           </p:nvCxnSpPr>
           <p:spPr>
             <a:xfrm>
-              <a:off x="11177145" y="1017300"/>
+              <a:off x="11137740" y="1017300"/>
               <a:ext cx="0" cy="2259156"/>
             </a:xfrm>
             <a:prstGeom prst="straightConnector1">
@@ -7887,8 +7771,8 @@
           </p:nvCxnSpPr>
           <p:spPr>
             <a:xfrm>
-              <a:off x="6428936" y="798907"/>
-              <a:ext cx="0" cy="2279496"/>
+              <a:off x="6389531" y="798907"/>
+              <a:ext cx="0" cy="2304650"/>
             </a:xfrm>
             <a:prstGeom prst="straightConnector1">
               <a:avLst/>
@@ -7931,7 +7815,7 @@
           </p:nvCxnSpPr>
           <p:spPr>
             <a:xfrm>
-              <a:off x="8468363" y="1028730"/>
+              <a:off x="8428958" y="1028730"/>
               <a:ext cx="0" cy="2279496"/>
             </a:xfrm>
             <a:prstGeom prst="straightConnector1">
@@ -7975,7 +7859,7 @@
           </p:nvCxnSpPr>
           <p:spPr>
             <a:xfrm flipH="1">
-              <a:off x="7335988" y="2605683"/>
+              <a:off x="7296583" y="2605683"/>
               <a:ext cx="3834932" cy="0"/>
             </a:xfrm>
             <a:prstGeom prst="straightConnector1">
@@ -8019,7 +7903,7 @@
           </p:nvCxnSpPr>
           <p:spPr>
             <a:xfrm flipH="1">
-              <a:off x="7346973" y="1142642"/>
+              <a:off x="7307568" y="1142642"/>
               <a:ext cx="3834932" cy="0"/>
             </a:xfrm>
             <a:prstGeom prst="straightConnector1">
@@ -8063,7 +7947,7 @@
           </p:nvCxnSpPr>
           <p:spPr>
             <a:xfrm flipH="1">
-              <a:off x="7346973" y="1627561"/>
+              <a:off x="7307568" y="1627561"/>
               <a:ext cx="3834932" cy="0"/>
             </a:xfrm>
             <a:prstGeom prst="straightConnector1">
@@ -8107,7 +7991,7 @@
           </p:nvCxnSpPr>
           <p:spPr>
             <a:xfrm flipH="1">
-              <a:off x="7346973" y="2118914"/>
+              <a:off x="7307568" y="2118914"/>
               <a:ext cx="3834932" cy="0"/>
             </a:xfrm>
             <a:prstGeom prst="straightConnector1">
@@ -8149,7 +8033,7 @@
           </p:nvSpPr>
           <p:spPr>
             <a:xfrm>
-              <a:off x="7331412" y="1242741"/>
+              <a:off x="7292007" y="1242741"/>
               <a:ext cx="1045960" cy="307777"/>
             </a:xfrm>
             <a:prstGeom prst="rect">
@@ -8196,7 +8080,7 @@
           </p:nvSpPr>
           <p:spPr>
             <a:xfrm>
-              <a:off x="7334221" y="1729778"/>
+              <a:off x="7294816" y="1729778"/>
               <a:ext cx="1045960" cy="307777"/>
             </a:xfrm>
             <a:prstGeom prst="rect">
@@ -8243,7 +8127,7 @@
           </p:nvSpPr>
           <p:spPr>
             <a:xfrm>
-              <a:off x="7286856" y="2159305"/>
+              <a:off x="7247451" y="2159305"/>
               <a:ext cx="1232419" cy="400110"/>
             </a:xfrm>
             <a:prstGeom prst="rect">
@@ -8307,7 +8191,7 @@
           </p:nvCxnSpPr>
           <p:spPr>
             <a:xfrm>
-              <a:off x="8752228" y="1469018"/>
+              <a:off x="8712823" y="1469018"/>
               <a:ext cx="91440" cy="0"/>
             </a:xfrm>
             <a:prstGeom prst="line">
@@ -8350,7 +8234,7 @@
           </p:nvCxnSpPr>
           <p:spPr>
             <a:xfrm>
-              <a:off x="8839858" y="1432823"/>
+              <a:off x="8800453" y="1432823"/>
               <a:ext cx="91440" cy="0"/>
             </a:xfrm>
             <a:prstGeom prst="line">
@@ -8393,7 +8277,7 @@
           </p:nvCxnSpPr>
           <p:spPr>
             <a:xfrm>
-              <a:off x="8931298" y="1389287"/>
+              <a:off x="8891893" y="1389287"/>
               <a:ext cx="91440" cy="0"/>
             </a:xfrm>
             <a:prstGeom prst="line">
@@ -8436,7 +8320,7 @@
           </p:nvCxnSpPr>
           <p:spPr>
             <a:xfrm>
-              <a:off x="9024643" y="1358603"/>
+              <a:off x="8985238" y="1358603"/>
               <a:ext cx="91440" cy="0"/>
             </a:xfrm>
             <a:prstGeom prst="line">
@@ -8479,7 +8363,7 @@
           </p:nvCxnSpPr>
           <p:spPr>
             <a:xfrm>
-              <a:off x="9113555" y="1331326"/>
+              <a:off x="9074150" y="1331326"/>
               <a:ext cx="91440" cy="0"/>
             </a:xfrm>
             <a:prstGeom prst="line">
@@ -8522,7 +8406,7 @@
           </p:nvCxnSpPr>
           <p:spPr>
             <a:xfrm>
-              <a:off x="9024643" y="1469018"/>
+              <a:off x="8985238" y="1469018"/>
               <a:ext cx="91440" cy="0"/>
             </a:xfrm>
             <a:prstGeom prst="line">
@@ -8565,7 +8449,7 @@
           </p:nvCxnSpPr>
           <p:spPr>
             <a:xfrm>
-              <a:off x="9204995" y="1469018"/>
+              <a:off x="9165590" y="1469018"/>
               <a:ext cx="91440" cy="0"/>
             </a:xfrm>
             <a:prstGeom prst="line">
@@ -8608,7 +8492,7 @@
           </p:nvCxnSpPr>
           <p:spPr>
             <a:xfrm>
-              <a:off x="9113555" y="1413810"/>
+              <a:off x="9074150" y="1413810"/>
               <a:ext cx="91440" cy="0"/>
             </a:xfrm>
             <a:prstGeom prst="line">
@@ -8651,7 +8535,7 @@
           </p:nvCxnSpPr>
           <p:spPr>
             <a:xfrm>
-              <a:off x="9296435" y="1294145"/>
+              <a:off x="9257030" y="1294145"/>
               <a:ext cx="91440" cy="0"/>
             </a:xfrm>
             <a:prstGeom prst="line">
@@ -8694,7 +8578,7 @@
           </p:nvCxnSpPr>
           <p:spPr>
             <a:xfrm>
-              <a:off x="9204995" y="1380798"/>
+              <a:off x="9165590" y="1380798"/>
               <a:ext cx="91440" cy="0"/>
             </a:xfrm>
             <a:prstGeom prst="line">
@@ -8737,7 +8621,7 @@
           </p:nvCxnSpPr>
           <p:spPr>
             <a:xfrm>
-              <a:off x="8752228" y="1305854"/>
+              <a:off x="8712823" y="1305854"/>
               <a:ext cx="91440" cy="0"/>
             </a:xfrm>
             <a:prstGeom prst="line">
@@ -8780,7 +8664,7 @@
           </p:nvCxnSpPr>
           <p:spPr>
             <a:xfrm>
-              <a:off x="9387058" y="1389287"/>
+              <a:off x="9347653" y="1389287"/>
               <a:ext cx="91440" cy="0"/>
             </a:xfrm>
             <a:prstGeom prst="line">
@@ -8823,7 +8707,7 @@
           </p:nvCxnSpPr>
           <p:spPr>
             <a:xfrm>
-              <a:off x="9484836" y="1469018"/>
+              <a:off x="9445431" y="1469018"/>
               <a:ext cx="91440" cy="0"/>
             </a:xfrm>
             <a:prstGeom prst="line">
@@ -8866,7 +8750,7 @@
           </p:nvCxnSpPr>
           <p:spPr>
             <a:xfrm>
-              <a:off x="9296435" y="1418452"/>
+              <a:off x="9257030" y="1418452"/>
               <a:ext cx="91440" cy="0"/>
             </a:xfrm>
             <a:prstGeom prst="line">
@@ -8909,7 +8793,7 @@
           </p:nvCxnSpPr>
           <p:spPr>
             <a:xfrm>
-              <a:off x="8706078" y="1154199"/>
+              <a:off x="8666673" y="1154199"/>
               <a:ext cx="0" cy="476481"/>
             </a:xfrm>
             <a:prstGeom prst="line">
@@ -8952,7 +8836,7 @@
           </p:nvCxnSpPr>
           <p:spPr>
             <a:xfrm>
-              <a:off x="9654768" y="1154199"/>
+              <a:off x="9615363" y="1154199"/>
               <a:ext cx="0" cy="476481"/>
             </a:xfrm>
             <a:prstGeom prst="line">
@@ -8995,7 +8879,7 @@
           </p:nvCxnSpPr>
           <p:spPr>
             <a:xfrm>
-              <a:off x="10161498" y="1154199"/>
+              <a:off x="10122093" y="1154199"/>
               <a:ext cx="0" cy="476481"/>
             </a:xfrm>
             <a:prstGeom prst="line">
@@ -9038,7 +8922,7 @@
           </p:nvCxnSpPr>
           <p:spPr>
             <a:xfrm>
-              <a:off x="10226698" y="1260512"/>
+              <a:off x="10187293" y="1260512"/>
               <a:ext cx="391772" cy="0"/>
             </a:xfrm>
             <a:prstGeom prst="line">
@@ -9081,7 +8965,7 @@
           </p:nvCxnSpPr>
           <p:spPr>
             <a:xfrm>
-              <a:off x="10226698" y="1365631"/>
+              <a:off x="10187293" y="1365631"/>
               <a:ext cx="391772" cy="0"/>
             </a:xfrm>
             <a:prstGeom prst="line">
@@ -9124,7 +9008,7 @@
           </p:nvCxnSpPr>
           <p:spPr>
             <a:xfrm>
-              <a:off x="10230508" y="1462442"/>
+              <a:off x="10191103" y="1462442"/>
               <a:ext cx="391772" cy="0"/>
             </a:xfrm>
             <a:prstGeom prst="line">
@@ -9167,7 +9051,7 @@
           </p:nvCxnSpPr>
           <p:spPr>
             <a:xfrm>
-              <a:off x="10619128" y="1571371"/>
+              <a:off x="10579723" y="1571371"/>
               <a:ext cx="391772" cy="0"/>
             </a:xfrm>
             <a:prstGeom prst="line">
@@ -9210,7 +9094,7 @@
           </p:nvCxnSpPr>
           <p:spPr>
             <a:xfrm>
-              <a:off x="10616842" y="1414399"/>
+              <a:off x="10577437" y="1414399"/>
               <a:ext cx="391772" cy="0"/>
             </a:xfrm>
             <a:prstGeom prst="line">
@@ -9253,7 +9137,7 @@
           </p:nvCxnSpPr>
           <p:spPr>
             <a:xfrm>
-              <a:off x="10619128" y="1312291"/>
+              <a:off x="10579723" y="1312291"/>
               <a:ext cx="391772" cy="0"/>
             </a:xfrm>
             <a:prstGeom prst="line">
@@ -9296,7 +9180,7 @@
           </p:nvCxnSpPr>
           <p:spPr>
             <a:xfrm>
-              <a:off x="11003938" y="1212633"/>
+              <a:off x="10964533" y="1212633"/>
               <a:ext cx="178412" cy="0"/>
             </a:xfrm>
             <a:prstGeom prst="line">
@@ -9339,7 +9223,7 @@
           </p:nvCxnSpPr>
           <p:spPr>
             <a:xfrm>
-              <a:off x="11007090" y="1365631"/>
+              <a:off x="10967685" y="1365631"/>
               <a:ext cx="182880" cy="0"/>
             </a:xfrm>
             <a:prstGeom prst="line">
@@ -9382,7 +9266,7 @@
           </p:nvCxnSpPr>
           <p:spPr>
             <a:xfrm>
-              <a:off x="11007748" y="1518031"/>
+              <a:off x="10968343" y="1518031"/>
               <a:ext cx="178412" cy="0"/>
             </a:xfrm>
             <a:prstGeom prst="line">
@@ -9425,7 +9309,7 @@
           </p:nvCxnSpPr>
           <p:spPr>
             <a:xfrm>
-              <a:off x="11007090" y="1450975"/>
+              <a:off x="10967685" y="1450975"/>
               <a:ext cx="182880" cy="0"/>
             </a:xfrm>
             <a:prstGeom prst="line">
@@ -9480,7 +9364,7 @@
           </p:blipFill>
           <p:spPr>
             <a:xfrm>
-              <a:off x="8750302" y="1520248"/>
+              <a:off x="8710897" y="1520248"/>
               <a:ext cx="389271" cy="724690"/>
             </a:xfrm>
             <a:prstGeom prst="rect">
@@ -9516,7 +9400,7 @@
           </p:blipFill>
           <p:spPr>
             <a:xfrm>
-              <a:off x="9169275" y="1691500"/>
+              <a:off x="9129870" y="1691500"/>
               <a:ext cx="389271" cy="389271"/>
             </a:xfrm>
             <a:prstGeom prst="rect">
@@ -9540,7 +9424,7 @@
           </p:nvCxnSpPr>
           <p:spPr>
             <a:xfrm>
-              <a:off x="8642358" y="1635890"/>
+              <a:off x="8602953" y="1635890"/>
               <a:ext cx="0" cy="476481"/>
             </a:xfrm>
             <a:prstGeom prst="line">
@@ -9595,7 +9479,7 @@
           </p:blipFill>
           <p:spPr>
             <a:xfrm>
-              <a:off x="9562411" y="1789339"/>
+              <a:off x="9523006" y="1789339"/>
               <a:ext cx="389271" cy="194635"/>
             </a:xfrm>
             <a:prstGeom prst="rect">
@@ -9619,7 +9503,7 @@
           </p:nvCxnSpPr>
           <p:spPr>
             <a:xfrm>
-              <a:off x="10029198" y="1627241"/>
+              <a:off x="9989793" y="1627241"/>
               <a:ext cx="0" cy="496199"/>
             </a:xfrm>
             <a:prstGeom prst="line">
@@ -9662,7 +9546,7 @@
           </p:nvCxnSpPr>
           <p:spPr>
             <a:xfrm>
-              <a:off x="10435598" y="1627241"/>
+              <a:off x="10396193" y="1627241"/>
               <a:ext cx="0" cy="489214"/>
             </a:xfrm>
             <a:prstGeom prst="line">
@@ -9717,7 +9601,7 @@
           </p:blipFill>
           <p:spPr>
             <a:xfrm flipH="1">
-              <a:off x="10528738" y="1602435"/>
+              <a:off x="10489333" y="1602435"/>
               <a:ext cx="396278" cy="551010"/>
             </a:xfrm>
             <a:prstGeom prst="rect">
@@ -9741,7 +9625,7 @@
           </p:nvCxnSpPr>
           <p:spPr>
             <a:xfrm>
-              <a:off x="10968998" y="1635671"/>
+              <a:off x="10929593" y="1635671"/>
               <a:ext cx="0" cy="480784"/>
             </a:xfrm>
             <a:prstGeom prst="line">
@@ -9782,7 +9666,7 @@
           </p:nvSpPr>
           <p:spPr>
             <a:xfrm>
-              <a:off x="9202061" y="659264"/>
+              <a:off x="9162656" y="659264"/>
               <a:ext cx="2310778" cy="338554"/>
             </a:xfrm>
             <a:prstGeom prst="rect">
@@ -9830,7 +9714,7 @@
           </p:nvCxnSpPr>
           <p:spPr>
             <a:xfrm>
-              <a:off x="8662678" y="1017300"/>
+              <a:off x="8623273" y="1017300"/>
               <a:ext cx="0" cy="112714"/>
             </a:xfrm>
             <a:prstGeom prst="line">
@@ -9873,7 +9757,7 @@
           </p:nvCxnSpPr>
           <p:spPr>
             <a:xfrm>
-              <a:off x="8836668" y="1017300"/>
+              <a:off x="8797263" y="1017300"/>
               <a:ext cx="0" cy="112714"/>
             </a:xfrm>
             <a:prstGeom prst="line">
@@ -9916,7 +9800,7 @@
           </p:nvCxnSpPr>
           <p:spPr>
             <a:xfrm>
-              <a:off x="9004328" y="1026536"/>
+              <a:off x="8964923" y="1026536"/>
               <a:ext cx="0" cy="112714"/>
             </a:xfrm>
             <a:prstGeom prst="line">
@@ -9959,7 +9843,7 @@
           </p:nvCxnSpPr>
           <p:spPr>
             <a:xfrm>
-              <a:off x="9169428" y="1021110"/>
+              <a:off x="9130023" y="1021110"/>
               <a:ext cx="0" cy="124144"/>
             </a:xfrm>
             <a:prstGeom prst="line">
@@ -10002,7 +9886,7 @@
           </p:nvCxnSpPr>
           <p:spPr>
             <a:xfrm>
-              <a:off x="9333238" y="1017300"/>
+              <a:off x="9293833" y="1017300"/>
               <a:ext cx="0" cy="112714"/>
             </a:xfrm>
             <a:prstGeom prst="line">
@@ -10045,7 +9929,7 @@
           </p:nvCxnSpPr>
           <p:spPr>
             <a:xfrm>
-              <a:off x="9507228" y="1017300"/>
+              <a:off x="9467823" y="1017300"/>
               <a:ext cx="0" cy="112714"/>
             </a:xfrm>
             <a:prstGeom prst="line">
@@ -10088,7 +9972,7 @@
           </p:nvCxnSpPr>
           <p:spPr>
             <a:xfrm>
-              <a:off x="9674888" y="1026536"/>
+              <a:off x="9635483" y="1026536"/>
               <a:ext cx="0" cy="112714"/>
             </a:xfrm>
             <a:prstGeom prst="line">
@@ -10131,7 +10015,7 @@
           </p:nvCxnSpPr>
           <p:spPr>
             <a:xfrm>
-              <a:off x="9839988" y="1021110"/>
+              <a:off x="9800583" y="1021110"/>
               <a:ext cx="0" cy="124144"/>
             </a:xfrm>
             <a:prstGeom prst="line">
@@ -10174,7 +10058,7 @@
           </p:nvCxnSpPr>
           <p:spPr>
             <a:xfrm>
-              <a:off x="10001258" y="1017300"/>
+              <a:off x="9961853" y="1017300"/>
               <a:ext cx="0" cy="112714"/>
             </a:xfrm>
             <a:prstGeom prst="line">
@@ -10217,7 +10101,7 @@
           </p:nvCxnSpPr>
           <p:spPr>
             <a:xfrm>
-              <a:off x="10175248" y="1017300"/>
+              <a:off x="10135843" y="1017300"/>
               <a:ext cx="0" cy="112714"/>
             </a:xfrm>
             <a:prstGeom prst="line">
@@ -10260,7 +10144,7 @@
           </p:nvCxnSpPr>
           <p:spPr>
             <a:xfrm>
-              <a:off x="10342908" y="1026536"/>
+              <a:off x="10303503" y="1026536"/>
               <a:ext cx="0" cy="112714"/>
             </a:xfrm>
             <a:prstGeom prst="line">
@@ -10303,7 +10187,7 @@
           </p:nvCxnSpPr>
           <p:spPr>
             <a:xfrm>
-              <a:off x="10508008" y="1021110"/>
+              <a:off x="10468603" y="1021110"/>
               <a:ext cx="0" cy="124144"/>
             </a:xfrm>
             <a:prstGeom prst="line">
@@ -10346,7 +10230,7 @@
           </p:nvCxnSpPr>
           <p:spPr>
             <a:xfrm>
-              <a:off x="10659118" y="1017300"/>
+              <a:off x="10619713" y="1017300"/>
               <a:ext cx="0" cy="112714"/>
             </a:xfrm>
             <a:prstGeom prst="line">
@@ -10389,7 +10273,7 @@
           </p:nvCxnSpPr>
           <p:spPr>
             <a:xfrm>
-              <a:off x="10833108" y="1017300"/>
+              <a:off x="10793703" y="1017300"/>
               <a:ext cx="0" cy="112714"/>
             </a:xfrm>
             <a:prstGeom prst="line">
@@ -10432,7 +10316,7 @@
           </p:nvCxnSpPr>
           <p:spPr>
             <a:xfrm>
-              <a:off x="11000768" y="1026536"/>
+              <a:off x="10961363" y="1026536"/>
               <a:ext cx="0" cy="112714"/>
             </a:xfrm>
             <a:prstGeom prst="line">
@@ -10475,7 +10359,7 @@
           </p:nvCxnSpPr>
           <p:spPr>
             <a:xfrm>
-              <a:off x="9748523" y="1002040"/>
+              <a:off x="9709118" y="1002040"/>
               <a:ext cx="0" cy="1586143"/>
             </a:xfrm>
             <a:prstGeom prst="straightConnector1">
@@ -10517,7 +10401,7 @@
           </p:nvSpPr>
           <p:spPr>
             <a:xfrm>
-              <a:off x="9704071" y="1021322"/>
+              <a:off x="9664666" y="1021322"/>
               <a:ext cx="88370" cy="56585"/>
             </a:xfrm>
             <a:prstGeom prst="rect">
@@ -10569,7 +10453,7 @@
           </p:nvSpPr>
           <p:spPr>
             <a:xfrm rot="10800000">
-              <a:off x="9705545" y="1078227"/>
+              <a:off x="9666140" y="1078227"/>
               <a:ext cx="84250" cy="56985"/>
             </a:xfrm>
             <a:prstGeom prst="triangle">
@@ -10623,7 +10507,7 @@
           </p:nvSpPr>
           <p:spPr>
             <a:xfrm>
-              <a:off x="7378893" y="2690442"/>
+              <a:off x="7339488" y="2690442"/>
               <a:ext cx="1045960" cy="523220"/>
             </a:xfrm>
             <a:prstGeom prst="rect">
@@ -10675,7 +10559,7 @@
           </p:nvCxnSpPr>
           <p:spPr>
             <a:xfrm>
-              <a:off x="9289387" y="2622228"/>
+              <a:off x="9249982" y="2622228"/>
               <a:ext cx="0" cy="654228"/>
             </a:xfrm>
             <a:prstGeom prst="straightConnector1">
@@ -10717,7 +10601,7 @@
           </p:nvSpPr>
           <p:spPr>
             <a:xfrm>
-              <a:off x="8447589" y="2699015"/>
+              <a:off x="8408184" y="2699015"/>
               <a:ext cx="906505" cy="523220"/>
             </a:xfrm>
             <a:prstGeom prst="rect">
@@ -10773,7 +10657,7 @@
           </p:nvSpPr>
           <p:spPr>
             <a:xfrm>
-              <a:off x="9389874" y="2684896"/>
+              <a:off x="9350469" y="2684896"/>
               <a:ext cx="1696641" cy="523220"/>
             </a:xfrm>
             <a:prstGeom prst="rect">
@@ -10832,7 +10716,7 @@
           </p:nvSpPr>
           <p:spPr>
             <a:xfrm>
-              <a:off x="11247121" y="1093238"/>
+              <a:off x="11207716" y="1093238"/>
               <a:ext cx="152399" cy="162885"/>
             </a:xfrm>
             <a:prstGeom prst="rect">
@@ -10879,7 +10763,7 @@
           </p:nvSpPr>
           <p:spPr>
             <a:xfrm>
-              <a:off x="11247121" y="1318094"/>
+              <a:off x="11207716" y="1318094"/>
               <a:ext cx="152399" cy="158279"/>
             </a:xfrm>
             <a:prstGeom prst="rect">
@@ -10926,7 +10810,7 @@
           </p:nvSpPr>
           <p:spPr>
             <a:xfrm>
-              <a:off x="11247121" y="1546665"/>
+              <a:off x="11207716" y="1546665"/>
               <a:ext cx="152399" cy="152593"/>
             </a:xfrm>
             <a:prstGeom prst="rect">
@@ -10973,7 +10857,7 @@
           </p:nvSpPr>
           <p:spPr>
             <a:xfrm>
-              <a:off x="11192509" y="1885329"/>
+              <a:off x="11153104" y="1885329"/>
               <a:ext cx="251712" cy="1169551"/>
             </a:xfrm>
             <a:prstGeom prst="rect">
@@ -10997,50 +10881,6 @@
             </a:p>
           </p:txBody>
         </p:sp>
-        <p:cxnSp>
-          <p:nvCxnSpPr>
-            <p:cNvPr id="393" name="直線矢印コネクタ 392">
-              <a:extLst>
-                <a:ext uri="{FF2B5EF4-FFF2-40B4-BE49-F238E27FC236}">
-                  <a16:creationId xmlns:a16="http://schemas.microsoft.com/office/drawing/2014/main" id="{F759EB83-70BB-C682-7085-215A329A1549}"/>
-                </a:ext>
-              </a:extLst>
-            </p:cNvPr>
-            <p:cNvCxnSpPr>
-              <a:cxnSpLocks/>
-            </p:cNvCxnSpPr>
-            <p:nvPr/>
-          </p:nvCxnSpPr>
-          <p:spPr>
-            <a:xfrm>
-              <a:off x="3209506" y="4773300"/>
-              <a:ext cx="562936" cy="0"/>
-            </a:xfrm>
-            <a:prstGeom prst="straightConnector1">
-              <a:avLst/>
-            </a:prstGeom>
-            <a:ln w="76200">
-              <a:solidFill>
-                <a:schemeClr val="tx1"/>
-              </a:solidFill>
-              <a:tailEnd type="triangle" w="med" len="sm"/>
-            </a:ln>
-          </p:spPr>
-          <p:style>
-            <a:lnRef idx="2">
-              <a:schemeClr val="accent1"/>
-            </a:lnRef>
-            <a:fillRef idx="0">
-              <a:schemeClr val="accent1"/>
-            </a:fillRef>
-            <a:effectRef idx="1">
-              <a:schemeClr val="accent1"/>
-            </a:effectRef>
-            <a:fontRef idx="minor">
-              <a:schemeClr val="tx1"/>
-            </a:fontRef>
-          </p:style>
-        </p:cxnSp>
         <p:sp>
           <p:nvSpPr>
             <p:cNvPr id="395" name="四角形: 角を丸くする 394">
@@ -11055,7 +10895,7 @@
           </p:nvSpPr>
           <p:spPr>
             <a:xfrm>
-              <a:off x="3815661" y="4496179"/>
+              <a:off x="3776256" y="4496179"/>
               <a:ext cx="2652186" cy="1748334"/>
             </a:xfrm>
             <a:prstGeom prst="roundRect">
@@ -11063,12 +10903,14 @@
                 <a:gd name="adj" fmla="val 13218"/>
               </a:avLst>
             </a:prstGeom>
-            <a:noFill/>
+            <a:solidFill>
+              <a:schemeClr val="bg1"/>
+            </a:solidFill>
             <a:ln w="57150" cap="rnd">
               <a:solidFill>
                 <a:schemeClr val="tx1"/>
               </a:solidFill>
-              <a:prstDash val="dash"/>
+              <a:prstDash val="sysDash"/>
               <a:round/>
             </a:ln>
           </p:spPr>
@@ -11115,7 +10957,7 @@
           </p:nvSpPr>
           <p:spPr>
             <a:xfrm>
-              <a:off x="3854206" y="4709515"/>
+              <a:off x="3814801" y="4709515"/>
               <a:ext cx="2595531" cy="1501565"/>
             </a:xfrm>
             <a:prstGeom prst="rect">
@@ -11225,51 +11067,6 @@
             </a:p>
           </p:txBody>
         </p:sp>
-        <p:cxnSp>
-          <p:nvCxnSpPr>
-            <p:cNvPr id="399" name="直線矢印コネクタ 398">
-              <a:extLst>
-                <a:ext uri="{FF2B5EF4-FFF2-40B4-BE49-F238E27FC236}">
-                  <a16:creationId xmlns:a16="http://schemas.microsoft.com/office/drawing/2014/main" id="{D07124DE-83ED-819D-9A12-D8457380A8C0}"/>
-                </a:ext>
-              </a:extLst>
-            </p:cNvPr>
-            <p:cNvCxnSpPr>
-              <a:cxnSpLocks/>
-            </p:cNvCxnSpPr>
-            <p:nvPr/>
-          </p:nvCxnSpPr>
-          <p:spPr>
-            <a:xfrm flipH="1">
-              <a:off x="3250758" y="5792157"/>
-              <a:ext cx="501015" cy="0"/>
-            </a:xfrm>
-            <a:prstGeom prst="straightConnector1">
-              <a:avLst/>
-            </a:prstGeom>
-            <a:ln w="76200">
-              <a:solidFill>
-                <a:schemeClr val="tx1"/>
-              </a:solidFill>
-              <a:headEnd type="triangle" w="med" len="sm"/>
-              <a:tailEnd type="triangle" w="med" len="sm"/>
-            </a:ln>
-          </p:spPr>
-          <p:style>
-            <a:lnRef idx="2">
-              <a:schemeClr val="accent1"/>
-            </a:lnRef>
-            <a:fillRef idx="0">
-              <a:schemeClr val="accent1"/>
-            </a:fillRef>
-            <a:effectRef idx="1">
-              <a:schemeClr val="accent1"/>
-            </a:effectRef>
-            <a:fontRef idx="minor">
-              <a:schemeClr val="tx1"/>
-            </a:fontRef>
-          </p:style>
-        </p:cxnSp>
         <p:sp>
           <p:nvSpPr>
             <p:cNvPr id="410" name="四角形: 角を丸くする 409">
@@ -11284,12 +11081,12 @@
           </p:nvSpPr>
           <p:spPr>
             <a:xfrm>
-              <a:off x="4401126" y="4419878"/>
-              <a:ext cx="1606372" cy="157202"/>
+              <a:off x="4284656" y="4376038"/>
+              <a:ext cx="1711960" cy="250572"/>
             </a:xfrm>
             <a:prstGeom prst="roundRect">
               <a:avLst>
-                <a:gd name="adj" fmla="val 0"/>
+                <a:gd name="adj" fmla="val 25342"/>
               </a:avLst>
             </a:prstGeom>
             <a:solidFill>
@@ -11344,7 +11141,7 @@
           </p:nvSpPr>
           <p:spPr>
             <a:xfrm>
-              <a:off x="4181242" y="4340120"/>
+              <a:off x="4141837" y="4340120"/>
               <a:ext cx="1996423" cy="338554"/>
             </a:xfrm>
             <a:prstGeom prst="rect">
@@ -11378,10 +11175,10 @@
         </p:sp>
         <p:cxnSp>
           <p:nvCxnSpPr>
-            <p:cNvPr id="412" name="直線コネクタ 411">
-              <a:extLst>
-                <a:ext uri="{FF2B5EF4-FFF2-40B4-BE49-F238E27FC236}">
-                  <a16:creationId xmlns:a16="http://schemas.microsoft.com/office/drawing/2014/main" id="{DAEDCF2B-BCB0-FEAC-0F3F-0C21C660199D}"/>
+            <p:cNvPr id="417" name="直線コネクタ 416">
+              <a:extLst>
+                <a:ext uri="{FF2B5EF4-FFF2-40B4-BE49-F238E27FC236}">
+                  <a16:creationId xmlns:a16="http://schemas.microsoft.com/office/drawing/2014/main" id="{0DFD2DF0-DBC0-7FE4-E8BB-24A383A7A32C}"/>
                 </a:ext>
               </a:extLst>
             </p:cNvPr>
@@ -11392,51 +11189,8 @@
           </p:nvCxnSpPr>
           <p:spPr>
             <a:xfrm>
-              <a:off x="8883429" y="3299251"/>
-              <a:ext cx="0" cy="562184"/>
-            </a:xfrm>
-            <a:prstGeom prst="line">
-              <a:avLst/>
-            </a:prstGeom>
-            <a:ln w="76200">
-              <a:solidFill>
-                <a:schemeClr val="tx1"/>
-              </a:solidFill>
-            </a:ln>
-          </p:spPr>
-          <p:style>
-            <a:lnRef idx="2">
-              <a:schemeClr val="accent1"/>
-            </a:lnRef>
-            <a:fillRef idx="0">
-              <a:schemeClr val="accent1"/>
-            </a:fillRef>
-            <a:effectRef idx="1">
-              <a:schemeClr val="accent1"/>
-            </a:effectRef>
-            <a:fontRef idx="minor">
-              <a:schemeClr val="tx1"/>
-            </a:fontRef>
-          </p:style>
-        </p:cxnSp>
-        <p:cxnSp>
-          <p:nvCxnSpPr>
-            <p:cNvPr id="417" name="直線コネクタ 416">
-              <a:extLst>
-                <a:ext uri="{FF2B5EF4-FFF2-40B4-BE49-F238E27FC236}">
-                  <a16:creationId xmlns:a16="http://schemas.microsoft.com/office/drawing/2014/main" id="{0DFD2DF0-DBC0-7FE4-E8BB-24A383A7A32C}"/>
-                </a:ext>
-              </a:extLst>
-            </p:cNvPr>
-            <p:cNvCxnSpPr>
-              <a:cxnSpLocks/>
-            </p:cNvCxnSpPr>
-            <p:nvPr/>
-          </p:nvCxnSpPr>
-          <p:spPr>
-            <a:xfrm flipH="1">
-              <a:off x="6467847" y="3823181"/>
-              <a:ext cx="2436845" cy="0"/>
+              <a:off x="6215082" y="3264596"/>
+              <a:ext cx="0" cy="394183"/>
             </a:xfrm>
             <a:prstGeom prst="line">
               <a:avLst/>
@@ -11477,7 +11231,7 @@
           </p:nvSpPr>
           <p:spPr>
             <a:xfrm>
-              <a:off x="3968920" y="3657843"/>
+              <a:off x="3929515" y="3657843"/>
               <a:ext cx="2392041" cy="580737"/>
             </a:xfrm>
             <a:prstGeom prst="roundRect">
@@ -11485,12 +11239,14 @@
                 <a:gd name="adj" fmla="val 13218"/>
               </a:avLst>
             </a:prstGeom>
-            <a:noFill/>
+            <a:solidFill>
+              <a:schemeClr val="bg1"/>
+            </a:solidFill>
             <a:ln w="57150" cap="rnd">
               <a:solidFill>
                 <a:schemeClr val="tx1"/>
               </a:solidFill>
-              <a:prstDash val="dash"/>
+              <a:prstDash val="sysDash"/>
             </a:ln>
           </p:spPr>
           <p:style>
@@ -11536,7 +11292,7 @@
           </p:nvSpPr>
           <p:spPr>
             <a:xfrm>
-              <a:off x="3976028" y="3708270"/>
+              <a:off x="3936623" y="3708270"/>
               <a:ext cx="2368751" cy="523220"/>
             </a:xfrm>
             <a:prstGeom prst="rect">
@@ -11588,7 +11344,7 @@
           </p:nvCxnSpPr>
           <p:spPr>
             <a:xfrm>
-              <a:off x="8492808" y="2368998"/>
+              <a:off x="8453403" y="2368998"/>
               <a:ext cx="262574" cy="0"/>
             </a:xfrm>
             <a:prstGeom prst="line">
@@ -11634,7 +11390,7 @@
           </p:nvCxnSpPr>
           <p:spPr>
             <a:xfrm flipV="1">
-              <a:off x="8755382" y="2249805"/>
+              <a:off x="8715977" y="2249805"/>
               <a:ext cx="207643" cy="120221"/>
             </a:xfrm>
             <a:prstGeom prst="line">
@@ -11680,7 +11436,7 @@
           </p:nvCxnSpPr>
           <p:spPr>
             <a:xfrm>
-              <a:off x="8961783" y="2250070"/>
+              <a:off x="8922378" y="2250070"/>
               <a:ext cx="268242" cy="98786"/>
             </a:xfrm>
             <a:prstGeom prst="line">
@@ -11726,7 +11482,7 @@
           </p:nvCxnSpPr>
           <p:spPr>
             <a:xfrm>
-              <a:off x="9230588" y="2351705"/>
+              <a:off x="9191183" y="2351705"/>
               <a:ext cx="370612" cy="49472"/>
             </a:xfrm>
             <a:prstGeom prst="line">
@@ -11772,7 +11528,7 @@
           </p:nvCxnSpPr>
           <p:spPr>
             <a:xfrm>
-              <a:off x="9606470" y="2401177"/>
+              <a:off x="9567065" y="2401177"/>
               <a:ext cx="253810" cy="150811"/>
             </a:xfrm>
             <a:prstGeom prst="line">
@@ -11818,7 +11574,7 @@
           </p:nvCxnSpPr>
           <p:spPr>
             <a:xfrm rot="5400000" flipH="1" flipV="1">
-              <a:off x="9828493" y="2271621"/>
+              <a:off x="9789088" y="2271621"/>
               <a:ext cx="312682" cy="246191"/>
             </a:xfrm>
             <a:prstGeom prst="curvedConnector3">
@@ -11866,7 +11622,7 @@
           </p:nvCxnSpPr>
           <p:spPr>
             <a:xfrm>
-              <a:off x="10108621" y="2234670"/>
+              <a:off x="10069216" y="2234670"/>
               <a:ext cx="485084" cy="0"/>
             </a:xfrm>
             <a:prstGeom prst="line">
@@ -11913,7 +11669,7 @@
           </p:nvCxnSpPr>
           <p:spPr>
             <a:xfrm>
-              <a:off x="10594396" y="2452396"/>
+              <a:off x="10554991" y="2452396"/>
               <a:ext cx="566999" cy="0"/>
             </a:xfrm>
             <a:prstGeom prst="line">
@@ -11960,7 +11716,7 @@
           </p:nvCxnSpPr>
           <p:spPr>
             <a:xfrm>
-              <a:off x="9986010" y="2394585"/>
+              <a:off x="9946605" y="2394585"/>
               <a:ext cx="0" cy="0"/>
             </a:xfrm>
             <a:prstGeom prst="line">
@@ -12006,7 +11762,7 @@
           </p:nvCxnSpPr>
           <p:spPr>
             <a:xfrm>
-              <a:off x="10594396" y="2224617"/>
+              <a:off x="10554991" y="2224617"/>
               <a:ext cx="0" cy="225874"/>
             </a:xfrm>
             <a:prstGeom prst="line">
@@ -12065,7 +11821,7 @@
           </p:blipFill>
           <p:spPr>
             <a:xfrm>
-              <a:off x="11248568" y="1100314"/>
+              <a:off x="11209163" y="1100314"/>
               <a:ext cx="150949" cy="150949"/>
             </a:xfrm>
             <a:prstGeom prst="rect">
@@ -12101,7 +11857,7 @@
           </p:blipFill>
           <p:spPr>
             <a:xfrm>
-              <a:off x="11269875" y="1333298"/>
+              <a:off x="11230470" y="1333298"/>
               <a:ext cx="122026" cy="122026"/>
             </a:xfrm>
             <a:prstGeom prst="rect">
@@ -12137,7 +11893,7 @@
           </p:blipFill>
           <p:spPr>
             <a:xfrm>
-              <a:off x="11264270" y="1564012"/>
+              <a:off x="11224865" y="1564012"/>
               <a:ext cx="121913" cy="112008"/>
             </a:xfrm>
             <a:prstGeom prst="rect">
@@ -12159,7 +11915,7 @@
           </p:nvSpPr>
           <p:spPr>
             <a:xfrm>
-              <a:off x="11256412" y="1551057"/>
+              <a:off x="11217007" y="1551057"/>
               <a:ext cx="133589" cy="153888"/>
             </a:xfrm>
             <a:prstGeom prst="rect">
@@ -12186,10 +11942,10 @@
         </p:sp>
         <p:cxnSp>
           <p:nvCxnSpPr>
-            <p:cNvPr id="474" name="直線コネクタ 473">
-              <a:extLst>
-                <a:ext uri="{FF2B5EF4-FFF2-40B4-BE49-F238E27FC236}">
-                  <a16:creationId xmlns:a16="http://schemas.microsoft.com/office/drawing/2014/main" id="{C9E81AA6-2592-3861-1245-BA317783E4A4}"/>
+            <p:cNvPr id="477" name="直線コネクタ 476">
+              <a:extLst>
+                <a:ext uri="{FF2B5EF4-FFF2-40B4-BE49-F238E27FC236}">
+                  <a16:creationId xmlns:a16="http://schemas.microsoft.com/office/drawing/2014/main" id="{6332A008-1E22-10B9-2D87-575EFD682E24}"/>
                 </a:ext>
               </a:extLst>
             </p:cNvPr>
@@ -12200,8 +11956,51 @@
           </p:nvCxnSpPr>
           <p:spPr>
             <a:xfrm flipH="1">
-              <a:off x="6492199" y="4112768"/>
-              <a:ext cx="1237529" cy="0"/>
+              <a:off x="6830966" y="2951478"/>
+              <a:ext cx="493669" cy="0"/>
+            </a:xfrm>
+            <a:prstGeom prst="line">
+              <a:avLst/>
+            </a:prstGeom>
+            <a:ln w="76200">
+              <a:solidFill>
+                <a:schemeClr val="tx1"/>
+              </a:solidFill>
+            </a:ln>
+          </p:spPr>
+          <p:style>
+            <a:lnRef idx="2">
+              <a:schemeClr val="accent1"/>
+            </a:lnRef>
+            <a:fillRef idx="0">
+              <a:schemeClr val="accent1"/>
+            </a:fillRef>
+            <a:effectRef idx="1">
+              <a:schemeClr val="accent1"/>
+            </a:effectRef>
+            <a:fontRef idx="minor">
+              <a:schemeClr val="tx1"/>
+            </a:fontRef>
+          </p:style>
+        </p:cxnSp>
+        <p:cxnSp>
+          <p:nvCxnSpPr>
+            <p:cNvPr id="556" name="直線コネクタ 555">
+              <a:extLst>
+                <a:ext uri="{FF2B5EF4-FFF2-40B4-BE49-F238E27FC236}">
+                  <a16:creationId xmlns:a16="http://schemas.microsoft.com/office/drawing/2014/main" id="{4F902D8A-F4CE-BC0A-F662-653665D29271}"/>
+                </a:ext>
+              </a:extLst>
+            </p:cNvPr>
+            <p:cNvCxnSpPr>
+              <a:cxnSpLocks/>
+            </p:cNvCxnSpPr>
+            <p:nvPr/>
+          </p:nvCxnSpPr>
+          <p:spPr>
+            <a:xfrm flipH="1">
+              <a:off x="6560217" y="5398888"/>
+              <a:ext cx="286953" cy="0"/>
             </a:xfrm>
             <a:prstGeom prst="line">
               <a:avLst/>
@@ -12231,10 +12030,10 @@
         </p:cxnSp>
         <p:cxnSp>
           <p:nvCxnSpPr>
-            <p:cNvPr id="477" name="直線コネクタ 476">
-              <a:extLst>
-                <a:ext uri="{FF2B5EF4-FFF2-40B4-BE49-F238E27FC236}">
-                  <a16:creationId xmlns:a16="http://schemas.microsoft.com/office/drawing/2014/main" id="{6332A008-1E22-10B9-2D87-575EFD682E24}"/>
+            <p:cNvPr id="19" name="直線コネクタ 18">
+              <a:extLst>
+                <a:ext uri="{FF2B5EF4-FFF2-40B4-BE49-F238E27FC236}">
+                  <a16:creationId xmlns:a16="http://schemas.microsoft.com/office/drawing/2014/main" id="{395FB6AB-664B-CB32-B407-A120CC3F5CC8}"/>
                 </a:ext>
               </a:extLst>
             </p:cNvPr>
@@ -12244,9 +12043,52 @@
             <p:nvPr/>
           </p:nvCxnSpPr>
           <p:spPr>
-            <a:xfrm>
-              <a:off x="7903320" y="3279100"/>
-              <a:ext cx="0" cy="562184"/>
+            <a:xfrm flipV="1">
+              <a:off x="6861446" y="2912745"/>
+              <a:ext cx="0" cy="396240"/>
+            </a:xfrm>
+            <a:prstGeom prst="line">
+              <a:avLst/>
+            </a:prstGeom>
+            <a:ln w="76200">
+              <a:solidFill>
+                <a:schemeClr val="tx1"/>
+              </a:solidFill>
+            </a:ln>
+          </p:spPr>
+          <p:style>
+            <a:lnRef idx="2">
+              <a:schemeClr val="accent1"/>
+            </a:lnRef>
+            <a:fillRef idx="0">
+              <a:schemeClr val="accent1"/>
+            </a:fillRef>
+            <a:effectRef idx="1">
+              <a:schemeClr val="accent1"/>
+            </a:effectRef>
+            <a:fontRef idx="minor">
+              <a:schemeClr val="tx1"/>
+            </a:fontRef>
+          </p:style>
+        </p:cxnSp>
+        <p:cxnSp>
+          <p:nvCxnSpPr>
+            <p:cNvPr id="25" name="直線コネクタ 24">
+              <a:extLst>
+                <a:ext uri="{FF2B5EF4-FFF2-40B4-BE49-F238E27FC236}">
+                  <a16:creationId xmlns:a16="http://schemas.microsoft.com/office/drawing/2014/main" id="{40F05C5B-3A1B-457C-056E-B2D1051E27A8}"/>
+                </a:ext>
+              </a:extLst>
+            </p:cNvPr>
+            <p:cNvCxnSpPr>
+              <a:cxnSpLocks/>
+            </p:cNvCxnSpPr>
+            <p:nvPr/>
+          </p:nvCxnSpPr>
+          <p:spPr>
+            <a:xfrm>
+              <a:off x="6176242" y="3269613"/>
+              <a:ext cx="712548" cy="0"/>
             </a:xfrm>
             <a:prstGeom prst="line">
               <a:avLst/>
@@ -12300,8 +12142,8 @@
           </p:blipFill>
           <p:spPr>
             <a:xfrm>
-              <a:off x="7324091" y="4965237"/>
-              <a:ext cx="863213" cy="863213"/>
+              <a:off x="10695265" y="5071673"/>
+              <a:ext cx="1231520" cy="1231520"/>
             </a:xfrm>
             <a:prstGeom prst="rect">
               <a:avLst/>
@@ -12324,7 +12166,7 @@
           </p:nvCxnSpPr>
           <p:spPr>
             <a:xfrm flipV="1">
-              <a:off x="7702844" y="4078605"/>
+              <a:off x="11299927" y="4088940"/>
               <a:ext cx="0" cy="939643"/>
             </a:xfrm>
             <a:prstGeom prst="line">
@@ -12353,51 +12195,6 @@
             </a:fontRef>
           </p:style>
         </p:cxnSp>
-        <p:cxnSp>
-          <p:nvCxnSpPr>
-            <p:cNvPr id="488" name="直線コネクタ 487">
-              <a:extLst>
-                <a:ext uri="{FF2B5EF4-FFF2-40B4-BE49-F238E27FC236}">
-                  <a16:creationId xmlns:a16="http://schemas.microsoft.com/office/drawing/2014/main" id="{D5C45449-B4E7-51DD-B250-CCB6CEFB96F3}"/>
-                </a:ext>
-              </a:extLst>
-            </p:cNvPr>
-            <p:cNvCxnSpPr>
-              <a:cxnSpLocks/>
-            </p:cNvCxnSpPr>
-            <p:nvPr/>
-          </p:nvCxnSpPr>
-          <p:spPr>
-            <a:xfrm flipH="1">
-              <a:off x="7670483" y="4626610"/>
-              <a:ext cx="992195" cy="0"/>
-            </a:xfrm>
-            <a:prstGeom prst="line">
-              <a:avLst/>
-            </a:prstGeom>
-            <a:ln w="76200">
-              <a:solidFill>
-                <a:schemeClr val="tx1"/>
-              </a:solidFill>
-              <a:headEnd type="triangle"/>
-              <a:tailEnd type="none"/>
-            </a:ln>
-          </p:spPr>
-          <p:style>
-            <a:lnRef idx="2">
-              <a:schemeClr val="accent1"/>
-            </a:lnRef>
-            <a:fillRef idx="0">
-              <a:schemeClr val="accent1"/>
-            </a:fillRef>
-            <a:effectRef idx="1">
-              <a:schemeClr val="accent1"/>
-            </a:effectRef>
-            <a:fontRef idx="minor">
-              <a:schemeClr val="tx1"/>
-            </a:fontRef>
-          </p:style>
-        </p:cxnSp>
         <p:pic>
           <p:nvPicPr>
             <p:cNvPr id="500" name="グラフィックス 499" descr="音符 単色塗りつぶし">
@@ -12426,8 +12223,8 @@
           </p:blipFill>
           <p:spPr>
             <a:xfrm>
-              <a:off x="7922356" y="4745244"/>
-              <a:ext cx="546007" cy="546007"/>
+              <a:off x="11335217" y="4607311"/>
+              <a:ext cx="778972" cy="778972"/>
             </a:xfrm>
             <a:prstGeom prst="rect">
               <a:avLst/>
@@ -12448,8 +12245,8 @@
           </p:nvSpPr>
           <p:spPr>
             <a:xfrm>
-              <a:off x="7196132" y="5781886"/>
-              <a:ext cx="1090040" cy="338554"/>
+              <a:off x="10538909" y="6183385"/>
+              <a:ext cx="1495047" cy="400110"/>
             </a:xfrm>
             <a:prstGeom prst="rect">
               <a:avLst/>
@@ -12464,7 +12261,7 @@
             <a:p>
               <a:pPr algn="ctr"/>
               <a:r>
-                <a:rPr kumimoji="1" lang="ja-JP" altLang="en-US" sz="1600" dirty="0">
+                <a:rPr kumimoji="1" lang="ja-JP" altLang="en-US" sz="2000" dirty="0">
                   <a:latin typeface="モボ-SemiBold" panose="02000700000000000000" pitchFamily="50" charset="-128"/>
                   <a:ea typeface="モボ-SemiBold" panose="02000700000000000000" pitchFamily="50" charset="-128"/>
                 </a:rPr>
@@ -12501,8 +12298,8 @@
           </p:blipFill>
           <p:spPr>
             <a:xfrm>
-              <a:off x="8941772" y="4159806"/>
-              <a:ext cx="667344" cy="681632"/>
+              <a:off x="9301191" y="4338313"/>
+              <a:ext cx="905728" cy="925120"/>
             </a:xfrm>
             <a:prstGeom prst="rect">
               <a:avLst/>
@@ -12525,7 +12322,7 @@
           </p:nvCxnSpPr>
           <p:spPr>
             <a:xfrm>
-              <a:off x="9110101" y="4451682"/>
+              <a:off x="9591441" y="4755982"/>
               <a:ext cx="173580" cy="0"/>
             </a:xfrm>
             <a:prstGeom prst="line">
@@ -12568,7 +12365,7 @@
           </p:nvCxnSpPr>
           <p:spPr>
             <a:xfrm>
-              <a:off x="9291936" y="4501212"/>
+              <a:off x="9773276" y="4805512"/>
               <a:ext cx="128475" cy="0"/>
             </a:xfrm>
             <a:prstGeom prst="line">
@@ -12611,7 +12408,7 @@
           </p:nvCxnSpPr>
           <p:spPr>
             <a:xfrm>
-              <a:off x="9204568" y="4555687"/>
+              <a:off x="9685908" y="4859987"/>
               <a:ext cx="93083" cy="0"/>
             </a:xfrm>
             <a:prstGeom prst="line">
@@ -12654,7 +12451,7 @@
           </p:nvCxnSpPr>
           <p:spPr>
             <a:xfrm>
-              <a:off x="9329329" y="4616647"/>
+              <a:off x="9810669" y="4920947"/>
               <a:ext cx="113460" cy="0"/>
             </a:xfrm>
             <a:prstGeom prst="line">
@@ -12697,7 +12494,7 @@
           </p:nvCxnSpPr>
           <p:spPr>
             <a:xfrm>
-              <a:off x="9139539" y="4661790"/>
+              <a:off x="9620879" y="4966090"/>
               <a:ext cx="146875" cy="0"/>
             </a:xfrm>
             <a:prstGeom prst="line">
@@ -12738,8 +12535,8 @@
           </p:nvSpPr>
           <p:spPr>
             <a:xfrm>
-              <a:off x="8820985" y="4832281"/>
-              <a:ext cx="929420" cy="307777"/>
+              <a:off x="9257514" y="5194290"/>
+              <a:ext cx="929420" cy="276999"/>
             </a:xfrm>
             <a:prstGeom prst="rect">
               <a:avLst/>
@@ -12754,14 +12551,14 @@
             <a:p>
               <a:pPr algn="ctr"/>
               <a:r>
-                <a:rPr lang="en-US" altLang="ja-JP" sz="1400" dirty="0">
+                <a:rPr lang="en-US" altLang="ja-JP" sz="1200" dirty="0">
                   <a:latin typeface="モボ-SemiBold" panose="02000700000000000000" pitchFamily="50" charset="-128"/>
                   <a:ea typeface="モボ-SemiBold" panose="02000700000000000000" pitchFamily="50" charset="-128"/>
                 </a:rPr>
                 <a:t>MIDI</a:t>
               </a:r>
               <a:r>
-                <a:rPr kumimoji="1" lang="ja-JP" altLang="en-US" sz="1400" dirty="0">
+                <a:rPr kumimoji="1" lang="ja-JP" altLang="en-US" sz="1200" dirty="0">
                   <a:latin typeface="モボ-SemiBold" panose="02000700000000000000" pitchFamily="50" charset="-128"/>
                   <a:ea typeface="モボ-SemiBold" panose="02000700000000000000" pitchFamily="50" charset="-128"/>
                 </a:rPr>
@@ -12784,8 +12581,8 @@
           </p:nvSpPr>
           <p:spPr>
             <a:xfrm>
-              <a:off x="8694743" y="4097320"/>
-              <a:ext cx="2252266" cy="2200830"/>
+              <a:off x="7615998" y="4297680"/>
+              <a:ext cx="2869122" cy="2396400"/>
             </a:xfrm>
             <a:prstGeom prst="roundRect">
               <a:avLst>
@@ -12856,113 +12653,20 @@
           </p:blipFill>
           <p:spPr>
             <a:xfrm>
-              <a:off x="9932030" y="4170002"/>
-              <a:ext cx="672282" cy="686675"/>
+              <a:off x="9314558" y="5515162"/>
+              <a:ext cx="896708" cy="915906"/>
             </a:xfrm>
             <a:prstGeom prst="rect">
               <a:avLst/>
             </a:prstGeom>
           </p:spPr>
         </p:pic>
-        <p:grpSp>
-          <p:nvGrpSpPr>
-            <p:cNvPr id="525" name="グループ化 524">
-              <a:extLst>
-                <a:ext uri="{FF2B5EF4-FFF2-40B4-BE49-F238E27FC236}">
-                  <a16:creationId xmlns:a16="http://schemas.microsoft.com/office/drawing/2014/main" id="{42398774-28BF-03FA-A1EC-DC9ED5143091}"/>
-                </a:ext>
-              </a:extLst>
-            </p:cNvPr>
-            <p:cNvGrpSpPr/>
-            <p:nvPr/>
-          </p:nvGrpSpPr>
-          <p:grpSpPr>
-            <a:xfrm>
-              <a:off x="10113577" y="4424403"/>
-              <a:ext cx="319348" cy="314484"/>
-              <a:chOff x="789711" y="2943782"/>
-              <a:chExt cx="641396" cy="530005"/>
-            </a:xfrm>
-          </p:grpSpPr>
-          <p:pic>
-            <p:nvPicPr>
-              <p:cNvPr id="526" name="グラフィックス 525" descr="矢印: 反時計回りの曲線 単色塗りつぶし">
-                <a:extLst>
-                  <a:ext uri="{FF2B5EF4-FFF2-40B4-BE49-F238E27FC236}">
-                    <a16:creationId xmlns:a16="http://schemas.microsoft.com/office/drawing/2014/main" id="{B98CA6AB-2B94-38B9-BA2A-D8D8C395CC3F}"/>
-                  </a:ext>
-                </a:extLst>
-              </p:cNvPr>
-              <p:cNvPicPr>
-                <a:picLocks noChangeAspect="1"/>
-              </p:cNvPicPr>
-              <p:nvPr/>
-            </p:nvPicPr>
-            <p:blipFill>
-              <a:blip r:embed="rId7">
-                <a:extLst>
-                  <a:ext uri="{96DAC541-7B7A-43D3-8B79-37D633B846F1}">
-                    <asvg:svgBlip xmlns:asvg="http://schemas.microsoft.com/office/drawing/2016/SVG/main" r:embed="rId8"/>
-                  </a:ext>
-                </a:extLst>
-              </a:blip>
-              <a:stretch>
-                <a:fillRect/>
-              </a:stretch>
-            </p:blipFill>
-            <p:spPr>
-              <a:xfrm rot="17376736">
-                <a:off x="867720" y="2865773"/>
-                <a:ext cx="451321" cy="607340"/>
-              </a:xfrm>
-              <a:prstGeom prst="rect">
-                <a:avLst/>
-              </a:prstGeom>
-            </p:spPr>
-          </p:pic>
-          <p:pic>
-            <p:nvPicPr>
-              <p:cNvPr id="527" name="グラフィックス 526" descr="矢印: 反時計回りの曲線 単色塗りつぶし">
-                <a:extLst>
-                  <a:ext uri="{FF2B5EF4-FFF2-40B4-BE49-F238E27FC236}">
-                    <a16:creationId xmlns:a16="http://schemas.microsoft.com/office/drawing/2014/main" id="{5830FE18-690B-2B62-5541-FD193E7FFC9F}"/>
-                  </a:ext>
-                </a:extLst>
-              </p:cNvPr>
-              <p:cNvPicPr>
-                <a:picLocks noChangeAspect="1"/>
-              </p:cNvPicPr>
-              <p:nvPr/>
-            </p:nvPicPr>
-            <p:blipFill>
-              <a:blip r:embed="rId7">
-                <a:extLst>
-                  <a:ext uri="{96DAC541-7B7A-43D3-8B79-37D633B846F1}">
-                    <asvg:svgBlip xmlns:asvg="http://schemas.microsoft.com/office/drawing/2016/SVG/main" r:embed="rId8"/>
-                  </a:ext>
-                </a:extLst>
-              </a:blip>
-              <a:stretch>
-                <a:fillRect/>
-              </a:stretch>
-            </p:blipFill>
-            <p:spPr>
-              <a:xfrm rot="6212480">
-                <a:off x="928411" y="2971090"/>
-                <a:ext cx="398052" cy="607341"/>
-              </a:xfrm>
-              <a:prstGeom prst="rect">
-                <a:avLst/>
-              </a:prstGeom>
-            </p:spPr>
-          </p:pic>
-        </p:grpSp>
         <p:pic>
           <p:nvPicPr>
-            <p:cNvPr id="529" name="グラフィックス 528" descr="紙 枠線">
-              <a:extLst>
-                <a:ext uri="{FF2B5EF4-FFF2-40B4-BE49-F238E27FC236}">
-                  <a16:creationId xmlns:a16="http://schemas.microsoft.com/office/drawing/2014/main" id="{4C31D9B1-6529-BB7D-E174-E813FB7DE4E3}"/>
+            <p:cNvPr id="526" name="グラフィックス 525" descr="矢印: 反時計回りの曲線 単色塗りつぶし">
+              <a:extLst>
+                <a:ext uri="{FF2B5EF4-FFF2-40B4-BE49-F238E27FC236}">
+                  <a16:creationId xmlns:a16="http://schemas.microsoft.com/office/drawing/2014/main" id="{B98CA6AB-2B94-38B9-BA2A-D8D8C395CC3F}"/>
                 </a:ext>
               </a:extLst>
             </p:cNvPr>
@@ -12972,10 +12676,10 @@
             <p:nvPr/>
           </p:nvPicPr>
           <p:blipFill>
-            <a:blip r:embed="rId5">
+            <a:blip r:embed="rId7">
               <a:extLst>
                 <a:ext uri="{96DAC541-7B7A-43D3-8B79-37D633B846F1}">
-                  <asvg:svgBlip xmlns:asvg="http://schemas.microsoft.com/office/drawing/2016/SVG/main" r:embed="rId6"/>
+                  <asvg:svgBlip xmlns:asvg="http://schemas.microsoft.com/office/drawing/2016/SVG/main" r:embed="rId8"/>
                 </a:ext>
               </a:extLst>
             </a:blip>
@@ -12984,9 +12688,9 @@
             </a:stretch>
           </p:blipFill>
           <p:spPr>
-            <a:xfrm>
-              <a:off x="8927558" y="5136631"/>
-              <a:ext cx="741051" cy="756917"/>
+            <a:xfrm rot="17376736">
+              <a:off x="9547360" y="5823385"/>
+              <a:ext cx="400512" cy="399017"/>
             </a:xfrm>
             <a:prstGeom prst="rect">
               <a:avLst/>
@@ -12995,10 +12699,10 @@
         </p:pic>
         <p:pic>
           <p:nvPicPr>
-            <p:cNvPr id="530" name="グラフィックス 529" descr="音声 単色塗りつぶし">
-              <a:extLst>
-                <a:ext uri="{FF2B5EF4-FFF2-40B4-BE49-F238E27FC236}">
-                  <a16:creationId xmlns:a16="http://schemas.microsoft.com/office/drawing/2014/main" id="{3ECF0529-E4D9-CF4C-8D18-4247F75A9DE4}"/>
+            <p:cNvPr id="527" name="グラフィックス 526" descr="矢印: 反時計回りの曲線 単色塗りつぶし">
+              <a:extLst>
+                <a:ext uri="{FF2B5EF4-FFF2-40B4-BE49-F238E27FC236}">
+                  <a16:creationId xmlns:a16="http://schemas.microsoft.com/office/drawing/2014/main" id="{5830FE18-690B-2B62-5541-FD193E7FFC9F}"/>
                 </a:ext>
               </a:extLst>
             </p:cNvPr>
@@ -13008,10 +12712,10 @@
             <p:nvPr/>
           </p:nvPicPr>
           <p:blipFill>
-            <a:blip r:embed="rId3">
+            <a:blip r:embed="rId7">
               <a:extLst>
                 <a:ext uri="{96DAC541-7B7A-43D3-8B79-37D633B846F1}">
-                  <asvg:svgBlip xmlns:asvg="http://schemas.microsoft.com/office/drawing/2016/SVG/main" r:embed="rId4"/>
+                  <asvg:svgBlip xmlns:asvg="http://schemas.microsoft.com/office/drawing/2016/SVG/main" r:embed="rId8"/>
                 </a:ext>
               </a:extLst>
             </a:blip>
@@ -13020,9 +12724,81 @@
             </a:stretch>
           </p:blipFill>
           <p:spPr>
-            <a:xfrm>
-              <a:off x="9101472" y="5324592"/>
-              <a:ext cx="384947" cy="433370"/>
+            <a:xfrm rot="6212480">
+              <a:off x="9593371" y="5916846"/>
+              <a:ext cx="353240" cy="399017"/>
+            </a:xfrm>
+            <a:prstGeom prst="rect">
+              <a:avLst/>
+            </a:prstGeom>
+          </p:spPr>
+        </p:pic>
+        <p:pic>
+          <p:nvPicPr>
+            <p:cNvPr id="529" name="グラフィックス 528" descr="紙 枠線">
+              <a:extLst>
+                <a:ext uri="{FF2B5EF4-FFF2-40B4-BE49-F238E27FC236}">
+                  <a16:creationId xmlns:a16="http://schemas.microsoft.com/office/drawing/2014/main" id="{4C31D9B1-6529-BB7D-E174-E813FB7DE4E3}"/>
+                </a:ext>
+              </a:extLst>
+            </p:cNvPr>
+            <p:cNvPicPr>
+              <a:picLocks noChangeAspect="1"/>
+            </p:cNvPicPr>
+            <p:nvPr/>
+          </p:nvPicPr>
+          <p:blipFill>
+            <a:blip r:embed="rId5">
+              <a:extLst>
+                <a:ext uri="{96DAC541-7B7A-43D3-8B79-37D633B846F1}">
+                  <asvg:svgBlip xmlns:asvg="http://schemas.microsoft.com/office/drawing/2016/SVG/main" r:embed="rId6"/>
+                </a:ext>
+              </a:extLst>
+            </a:blip>
+            <a:stretch>
+              <a:fillRect/>
+            </a:stretch>
+          </p:blipFill>
+          <p:spPr>
+            <a:xfrm>
+              <a:off x="7960249" y="4320528"/>
+              <a:ext cx="935501" cy="955530"/>
+            </a:xfrm>
+            <a:prstGeom prst="rect">
+              <a:avLst/>
+            </a:prstGeom>
+          </p:spPr>
+        </p:pic>
+        <p:pic>
+          <p:nvPicPr>
+            <p:cNvPr id="530" name="グラフィックス 529" descr="音声 単色塗りつぶし">
+              <a:extLst>
+                <a:ext uri="{FF2B5EF4-FFF2-40B4-BE49-F238E27FC236}">
+                  <a16:creationId xmlns:a16="http://schemas.microsoft.com/office/drawing/2014/main" id="{3ECF0529-E4D9-CF4C-8D18-4247F75A9DE4}"/>
+                </a:ext>
+              </a:extLst>
+            </p:cNvPr>
+            <p:cNvPicPr>
+              <a:picLocks noChangeAspect="1"/>
+            </p:cNvPicPr>
+            <p:nvPr/>
+          </p:nvPicPr>
+          <p:blipFill>
+            <a:blip r:embed="rId3">
+              <a:extLst>
+                <a:ext uri="{96DAC541-7B7A-43D3-8B79-37D633B846F1}">
+                  <asvg:svgBlip xmlns:asvg="http://schemas.microsoft.com/office/drawing/2016/SVG/main" r:embed="rId4"/>
+                </a:ext>
+              </a:extLst>
+            </a:blip>
+            <a:stretch>
+              <a:fillRect/>
+            </a:stretch>
+          </p:blipFill>
+          <p:spPr>
+            <a:xfrm>
+              <a:off x="8195566" y="4573222"/>
+              <a:ext cx="465953" cy="524566"/>
             </a:xfrm>
             <a:prstGeom prst="rect">
               <a:avLst/>
@@ -13043,8 +12819,8 @@
           </p:nvSpPr>
           <p:spPr>
             <a:xfrm>
-              <a:off x="8776880" y="5829115"/>
-              <a:ext cx="1027914" cy="430887"/>
+              <a:off x="7712357" y="5194290"/>
+              <a:ext cx="1417856" cy="276999"/>
             </a:xfrm>
             <a:prstGeom prst="rect">
               <a:avLst/>
@@ -13059,27 +12835,20 @@
             <a:p>
               <a:pPr algn="ctr"/>
               <a:r>
-                <a:rPr kumimoji="1" lang="ja-JP" altLang="en-US" sz="1050" dirty="0">
+                <a:rPr kumimoji="1" lang="ja-JP" altLang="en-US" sz="1200" dirty="0">
                   <a:latin typeface="モボ-SemiBold" panose="02000700000000000000" pitchFamily="50" charset="-128"/>
                   <a:ea typeface="モボ-SemiBold" panose="02000700000000000000" pitchFamily="50" charset="-128"/>
                 </a:rPr>
                 <a:t>音声ファイル</a:t>
               </a:r>
-              <a:endParaRPr kumimoji="1" lang="en-US" altLang="ja-JP" sz="1050" dirty="0">
-                <a:latin typeface="モボ-SemiBold" panose="02000700000000000000" pitchFamily="50" charset="-128"/>
-                <a:ea typeface="モボ-SemiBold" panose="02000700000000000000" pitchFamily="50" charset="-128"/>
-              </a:endParaRPr>
-            </a:p>
-            <a:p>
-              <a:pPr algn="ctr"/>
               <a:r>
-                <a:rPr lang="ja-JP" altLang="en-US" sz="1050" dirty="0">
+                <a:rPr lang="ja-JP" altLang="en-US" sz="1200" dirty="0">
                   <a:latin typeface="モボ-SemiBold" panose="02000700000000000000" pitchFamily="50" charset="-128"/>
                   <a:ea typeface="モボ-SemiBold" panose="02000700000000000000" pitchFamily="50" charset="-128"/>
                 </a:rPr>
                 <a:t>出力</a:t>
               </a:r>
-              <a:endParaRPr kumimoji="1" lang="ja-JP" altLang="en-US" sz="1050" dirty="0">
+              <a:endParaRPr kumimoji="1" lang="ja-JP" altLang="en-US" sz="1200" dirty="0">
                 <a:latin typeface="モボ-SemiBold" panose="02000700000000000000" pitchFamily="50" charset="-128"/>
                 <a:ea typeface="モボ-SemiBold" panose="02000700000000000000" pitchFamily="50" charset="-128"/>
               </a:endParaRPr>
@@ -13114,8 +12883,8 @@
           </p:blipFill>
           <p:spPr>
             <a:xfrm>
-              <a:off x="9932131" y="5156798"/>
-              <a:ext cx="705632" cy="741024"/>
+              <a:off x="7981883" y="5499015"/>
+              <a:ext cx="918462" cy="935466"/>
             </a:xfrm>
             <a:prstGeom prst="rect">
               <a:avLst/>
@@ -13136,8 +12905,8 @@
           </p:nvSpPr>
           <p:spPr>
             <a:xfrm>
-              <a:off x="10067569" y="5372855"/>
-              <a:ext cx="420623" cy="400110"/>
+              <a:off x="8225138" y="5752884"/>
+              <a:ext cx="420623" cy="523220"/>
             </a:xfrm>
             <a:prstGeom prst="rect">
               <a:avLst/>
@@ -13152,7 +12921,7 @@
             <a:p>
               <a:pPr algn="ctr"/>
               <a:r>
-                <a:rPr kumimoji="1" lang="ja-JP" altLang="en-US" sz="2000" dirty="0">
+                <a:rPr kumimoji="1" lang="ja-JP" altLang="en-US" sz="2800" dirty="0">
                   <a:latin typeface="+mj-ea"/>
                   <a:ea typeface="+mj-ea"/>
                 </a:rPr>
@@ -13175,8 +12944,8 @@
           </p:nvSpPr>
           <p:spPr>
             <a:xfrm>
-              <a:off x="9798904" y="4797921"/>
-              <a:ext cx="929420" cy="430887"/>
+              <a:off x="9038949" y="6365072"/>
+              <a:ext cx="1466579" cy="276999"/>
             </a:xfrm>
             <a:prstGeom prst="rect">
               <a:avLst/>
@@ -13191,23 +12960,20 @@
             <a:p>
               <a:pPr algn="ctr"/>
               <a:r>
-                <a:rPr lang="en-US" altLang="ja-JP" sz="1050" dirty="0">
+                <a:rPr lang="en-US" altLang="ja-JP" sz="1200" dirty="0">
                   <a:latin typeface="モボ-SemiBold" panose="02000700000000000000" pitchFamily="50" charset="-128"/>
                   <a:ea typeface="モボ-SemiBold" panose="02000700000000000000" pitchFamily="50" charset="-128"/>
                 </a:rPr>
                 <a:t>dawproject</a:t>
               </a:r>
-            </a:p>
-            <a:p>
-              <a:pPr algn="ctr"/>
               <a:r>
-                <a:rPr lang="ja-JP" altLang="en-US" sz="1050" dirty="0">
+                <a:rPr lang="ja-JP" altLang="en-US" sz="1200" dirty="0">
                   <a:latin typeface="モボ-SemiBold" panose="02000700000000000000" pitchFamily="50" charset="-128"/>
                   <a:ea typeface="モボ-SemiBold" panose="02000700000000000000" pitchFamily="50" charset="-128"/>
                 </a:rPr>
                 <a:t>出力</a:t>
               </a:r>
-              <a:endParaRPr kumimoji="1" lang="ja-JP" altLang="en-US" sz="1050" dirty="0">
+              <a:endParaRPr kumimoji="1" lang="ja-JP" altLang="en-US" sz="1200" dirty="0">
                 <a:latin typeface="モボ-SemiBold" panose="02000700000000000000" pitchFamily="50" charset="-128"/>
                 <a:ea typeface="モボ-SemiBold" panose="02000700000000000000" pitchFamily="50" charset="-128"/>
               </a:endParaRPr>
@@ -13228,8 +12994,8 @@
           </p:nvSpPr>
           <p:spPr>
             <a:xfrm>
-              <a:off x="9769540" y="5838257"/>
-              <a:ext cx="1027914" cy="415498"/>
+              <a:off x="7712357" y="6369041"/>
+              <a:ext cx="1450819" cy="276999"/>
             </a:xfrm>
             <a:prstGeom prst="rect">
               <a:avLst/>
@@ -13244,259 +13010,21 @@
             <a:p>
               <a:pPr algn="ctr"/>
               <a:r>
-                <a:rPr kumimoji="1" lang="ja-JP" altLang="en-US" sz="1050" dirty="0">
+                <a:rPr kumimoji="1" lang="ja-JP" altLang="en-US" sz="1200" dirty="0">
                   <a:latin typeface="モボ-SemiBold" panose="02000700000000000000" pitchFamily="50" charset="-128"/>
                   <a:ea typeface="モボ-SemiBold" panose="02000700000000000000" pitchFamily="50" charset="-128"/>
                 </a:rPr>
-                <a:t>プラグインで</a:t>
-              </a:r>
-              <a:endParaRPr kumimoji="1" lang="en-US" altLang="ja-JP" sz="1050" dirty="0">
-                <a:latin typeface="モボ-SemiBold" panose="02000700000000000000" pitchFamily="50" charset="-128"/>
-                <a:ea typeface="モボ-SemiBold" panose="02000700000000000000" pitchFamily="50" charset="-128"/>
-              </a:endParaRPr>
-            </a:p>
-            <a:p>
-              <a:pPr algn="ctr"/>
-              <a:r>
-                <a:rPr kumimoji="1" lang="ja-JP" altLang="en-US" sz="1050" dirty="0">
-                  <a:latin typeface="モボ-SemiBold" panose="02000700000000000000" pitchFamily="50" charset="-128"/>
-                  <a:ea typeface="モボ-SemiBold" panose="02000700000000000000" pitchFamily="50" charset="-128"/>
-                </a:rPr>
-                <a:t>拡張</a:t>
+                <a:t>プラグインで拡張</a:t>
               </a:r>
             </a:p>
           </p:txBody>
         </p:sp>
-        <p:cxnSp>
-          <p:nvCxnSpPr>
-            <p:cNvPr id="556" name="直線コネクタ 555">
-              <a:extLst>
-                <a:ext uri="{FF2B5EF4-FFF2-40B4-BE49-F238E27FC236}">
-                  <a16:creationId xmlns:a16="http://schemas.microsoft.com/office/drawing/2014/main" id="{4F902D8A-F4CE-BC0A-F662-653665D29271}"/>
-                </a:ext>
-              </a:extLst>
-            </p:cNvPr>
-            <p:cNvCxnSpPr>
-              <a:cxnSpLocks/>
-            </p:cNvCxnSpPr>
-            <p:nvPr/>
-          </p:nvCxnSpPr>
-          <p:spPr>
-            <a:xfrm flipH="1">
-              <a:off x="6599622" y="5398888"/>
-              <a:ext cx="286953" cy="0"/>
-            </a:xfrm>
-            <a:prstGeom prst="line">
-              <a:avLst/>
-            </a:prstGeom>
-            <a:ln w="76200">
-              <a:solidFill>
-                <a:schemeClr val="tx1"/>
-              </a:solidFill>
-              <a:headEnd type="none"/>
-              <a:tailEnd type="none"/>
-            </a:ln>
-          </p:spPr>
-          <p:style>
-            <a:lnRef idx="2">
-              <a:schemeClr val="accent1"/>
-            </a:lnRef>
-            <a:fillRef idx="0">
-              <a:schemeClr val="accent1"/>
-            </a:fillRef>
-            <a:effectRef idx="1">
-              <a:schemeClr val="accent1"/>
-            </a:effectRef>
-            <a:fontRef idx="minor">
-              <a:schemeClr val="tx1"/>
-            </a:fontRef>
-          </p:style>
-        </p:cxnSp>
-        <p:cxnSp>
-          <p:nvCxnSpPr>
-            <p:cNvPr id="559" name="直線コネクタ 558">
-              <a:extLst>
-                <a:ext uri="{FF2B5EF4-FFF2-40B4-BE49-F238E27FC236}">
-                  <a16:creationId xmlns:a16="http://schemas.microsoft.com/office/drawing/2014/main" id="{26C83082-64F7-DCC5-9E00-5B47D6830C23}"/>
-                </a:ext>
-              </a:extLst>
-            </p:cNvPr>
-            <p:cNvCxnSpPr>
-              <a:cxnSpLocks/>
-            </p:cNvCxnSpPr>
-            <p:nvPr/>
-          </p:nvCxnSpPr>
-          <p:spPr>
-            <a:xfrm flipV="1">
-              <a:off x="6854813" y="5372100"/>
-              <a:ext cx="0" cy="1134487"/>
-            </a:xfrm>
-            <a:prstGeom prst="line">
-              <a:avLst/>
-            </a:prstGeom>
-            <a:ln w="76200">
-              <a:solidFill>
-                <a:schemeClr val="tx1"/>
-              </a:solidFill>
-              <a:headEnd type="none"/>
-              <a:tailEnd type="none"/>
-            </a:ln>
-          </p:spPr>
-          <p:style>
-            <a:lnRef idx="2">
-              <a:schemeClr val="accent1"/>
-            </a:lnRef>
-            <a:fillRef idx="0">
-              <a:schemeClr val="accent1"/>
-            </a:fillRef>
-            <a:effectRef idx="1">
-              <a:schemeClr val="accent1"/>
-            </a:effectRef>
-            <a:fontRef idx="minor">
-              <a:schemeClr val="tx1"/>
-            </a:fontRef>
-          </p:style>
-        </p:cxnSp>
-        <p:cxnSp>
-          <p:nvCxnSpPr>
-            <p:cNvPr id="566" name="直線コネクタ 565">
-              <a:extLst>
-                <a:ext uri="{FF2B5EF4-FFF2-40B4-BE49-F238E27FC236}">
-                  <a16:creationId xmlns:a16="http://schemas.microsoft.com/office/drawing/2014/main" id="{252A01C0-2BB7-C5DE-E45F-FF29027043A4}"/>
-                </a:ext>
-              </a:extLst>
-            </p:cNvPr>
-            <p:cNvCxnSpPr>
-              <a:cxnSpLocks/>
-            </p:cNvCxnSpPr>
-            <p:nvPr/>
-          </p:nvCxnSpPr>
-          <p:spPr>
-            <a:xfrm flipH="1">
-              <a:off x="6818237" y="6482203"/>
-              <a:ext cx="4512703" cy="0"/>
-            </a:xfrm>
-            <a:prstGeom prst="line">
-              <a:avLst/>
-            </a:prstGeom>
-            <a:ln w="76200">
-              <a:solidFill>
-                <a:schemeClr val="tx1"/>
-              </a:solidFill>
-              <a:headEnd type="none"/>
-              <a:tailEnd type="none"/>
-            </a:ln>
-          </p:spPr>
-          <p:style>
-            <a:lnRef idx="2">
-              <a:schemeClr val="accent1"/>
-            </a:lnRef>
-            <a:fillRef idx="0">
-              <a:schemeClr val="accent1"/>
-            </a:fillRef>
-            <a:effectRef idx="1">
-              <a:schemeClr val="accent1"/>
-            </a:effectRef>
-            <a:fontRef idx="minor">
-              <a:schemeClr val="tx1"/>
-            </a:fontRef>
-          </p:style>
-        </p:cxnSp>
-        <p:cxnSp>
-          <p:nvCxnSpPr>
-            <p:cNvPr id="568" name="直線コネクタ 567">
-              <a:extLst>
-                <a:ext uri="{FF2B5EF4-FFF2-40B4-BE49-F238E27FC236}">
-                  <a16:creationId xmlns:a16="http://schemas.microsoft.com/office/drawing/2014/main" id="{1882C085-2C97-7319-7E16-F7943050226B}"/>
-                </a:ext>
-              </a:extLst>
-            </p:cNvPr>
-            <p:cNvCxnSpPr>
-              <a:cxnSpLocks/>
-            </p:cNvCxnSpPr>
-            <p:nvPr/>
-          </p:nvCxnSpPr>
-          <p:spPr>
-            <a:xfrm flipV="1">
-              <a:off x="11313419" y="3332480"/>
-              <a:ext cx="0" cy="3184046"/>
-            </a:xfrm>
-            <a:prstGeom prst="line">
-              <a:avLst/>
-            </a:prstGeom>
-            <a:ln w="76200">
-              <a:solidFill>
-                <a:schemeClr val="tx1"/>
-              </a:solidFill>
-              <a:headEnd type="none"/>
-              <a:tailEnd type="triangle"/>
-            </a:ln>
-          </p:spPr>
-          <p:style>
-            <a:lnRef idx="2">
-              <a:schemeClr val="accent1"/>
-            </a:lnRef>
-            <a:fillRef idx="0">
-              <a:schemeClr val="accent1"/>
-            </a:fillRef>
-            <a:effectRef idx="1">
-              <a:schemeClr val="accent1"/>
-            </a:effectRef>
-            <a:fontRef idx="minor">
-              <a:schemeClr val="tx1"/>
-            </a:fontRef>
-          </p:style>
-        </p:cxnSp>
-        <p:cxnSp>
-          <p:nvCxnSpPr>
-            <p:cNvPr id="570" name="直線コネクタ 569">
-              <a:extLst>
-                <a:ext uri="{FF2B5EF4-FFF2-40B4-BE49-F238E27FC236}">
-                  <a16:creationId xmlns:a16="http://schemas.microsoft.com/office/drawing/2014/main" id="{FC317399-BD8E-6BF5-14B8-3E2250718876}"/>
-                </a:ext>
-              </a:extLst>
-            </p:cNvPr>
-            <p:cNvCxnSpPr>
-              <a:cxnSpLocks/>
-            </p:cNvCxnSpPr>
-            <p:nvPr/>
-          </p:nvCxnSpPr>
-          <p:spPr>
-            <a:xfrm flipH="1">
-              <a:off x="10220325" y="3841284"/>
-              <a:ext cx="1114425" cy="0"/>
-            </a:xfrm>
-            <a:prstGeom prst="line">
-              <a:avLst/>
-            </a:prstGeom>
-            <a:ln w="76200">
-              <a:solidFill>
-                <a:schemeClr val="tx1"/>
-              </a:solidFill>
-              <a:tailEnd type="none"/>
-            </a:ln>
-          </p:spPr>
-          <p:style>
-            <a:lnRef idx="2">
-              <a:schemeClr val="accent1"/>
-            </a:lnRef>
-            <a:fillRef idx="0">
-              <a:schemeClr val="accent1"/>
-            </a:fillRef>
-            <a:effectRef idx="1">
-              <a:schemeClr val="accent1"/>
-            </a:effectRef>
-            <a:fontRef idx="minor">
-              <a:schemeClr val="tx1"/>
-            </a:fontRef>
-          </p:style>
-        </p:cxnSp>
         <p:sp>
           <p:nvSpPr>
-            <p:cNvPr id="577" name="正方形/長方形 576">
-              <a:extLst>
-                <a:ext uri="{FF2B5EF4-FFF2-40B4-BE49-F238E27FC236}">
-                  <a16:creationId xmlns:a16="http://schemas.microsoft.com/office/drawing/2014/main" id="{7C6A85AC-1EE5-E94C-5C79-0B25A448FFF1}"/>
+            <p:cNvPr id="56" name="正方形/長方形 55">
+              <a:extLst>
+                <a:ext uri="{FF2B5EF4-FFF2-40B4-BE49-F238E27FC236}">
+                  <a16:creationId xmlns:a16="http://schemas.microsoft.com/office/drawing/2014/main" id="{5AFA2A02-390B-1B0F-B15D-4030600FE465}"/>
                 </a:ext>
               </a:extLst>
             </p:cNvPr>
@@ -13505,8 +13033,166 @@
           </p:nvSpPr>
           <p:spPr>
             <a:xfrm>
-              <a:off x="10845800" y="5476240"/>
-              <a:ext cx="205740" cy="277733"/>
+              <a:off x="7540220" y="5840067"/>
+              <a:ext cx="134730" cy="348637"/>
+            </a:xfrm>
+            <a:prstGeom prst="rect">
+              <a:avLst/>
+            </a:prstGeom>
+            <a:solidFill>
+              <a:schemeClr val="bg1"/>
+            </a:solidFill>
+            <a:ln>
+              <a:noFill/>
+            </a:ln>
+          </p:spPr>
+          <p:style>
+            <a:lnRef idx="2">
+              <a:schemeClr val="accent1">
+                <a:shade val="15000"/>
+              </a:schemeClr>
+            </a:lnRef>
+            <a:fillRef idx="1">
+              <a:schemeClr val="accent1"/>
+            </a:fillRef>
+            <a:effectRef idx="0">
+              <a:schemeClr val="accent1"/>
+            </a:effectRef>
+            <a:fontRef idx="minor">
+              <a:schemeClr val="lt1"/>
+            </a:fontRef>
+          </p:style>
+          <p:txBody>
+            <a:bodyPr rtlCol="0" anchor="ctr"/>
+            <a:lstStyle/>
+            <a:p>
+              <a:pPr algn="ctr"/>
+              <a:endParaRPr kumimoji="1" lang="ja-JP" altLang="en-US"/>
+            </a:p>
+          </p:txBody>
+        </p:sp>
+        <p:sp>
+          <p:nvSpPr>
+            <p:cNvPr id="495" name="正方形/長方形 494">
+              <a:extLst>
+                <a:ext uri="{FF2B5EF4-FFF2-40B4-BE49-F238E27FC236}">
+                  <a16:creationId xmlns:a16="http://schemas.microsoft.com/office/drawing/2014/main" id="{08131C20-F7B4-09CA-D7F2-B0C9CB126387}"/>
+                </a:ext>
+              </a:extLst>
+            </p:cNvPr>
+            <p:cNvSpPr/>
+            <p:nvPr/>
+          </p:nvSpPr>
+          <p:spPr>
+            <a:xfrm>
+              <a:off x="6917311" y="4006195"/>
+              <a:ext cx="134730" cy="205737"/>
+            </a:xfrm>
+            <a:prstGeom prst="rect">
+              <a:avLst/>
+            </a:prstGeom>
+            <a:solidFill>
+              <a:schemeClr val="bg1">
+                <a:lumMod val="95000"/>
+              </a:schemeClr>
+            </a:solidFill>
+            <a:ln>
+              <a:noFill/>
+            </a:ln>
+          </p:spPr>
+          <p:style>
+            <a:lnRef idx="2">
+              <a:schemeClr val="accent1">
+                <a:shade val="15000"/>
+              </a:schemeClr>
+            </a:lnRef>
+            <a:fillRef idx="1">
+              <a:schemeClr val="accent1"/>
+            </a:fillRef>
+            <a:effectRef idx="0">
+              <a:schemeClr val="accent1"/>
+            </a:effectRef>
+            <a:fontRef idx="minor">
+              <a:schemeClr val="lt1"/>
+            </a:fontRef>
+          </p:style>
+          <p:txBody>
+            <a:bodyPr rtlCol="0" anchor="ctr"/>
+            <a:lstStyle/>
+            <a:p>
+              <a:pPr algn="ctr"/>
+              <a:endParaRPr kumimoji="1" lang="ja-JP" altLang="en-US"/>
+            </a:p>
+          </p:txBody>
+        </p:sp>
+        <p:sp>
+          <p:nvSpPr>
+            <p:cNvPr id="62" name="正方形/長方形 61">
+              <a:extLst>
+                <a:ext uri="{FF2B5EF4-FFF2-40B4-BE49-F238E27FC236}">
+                  <a16:creationId xmlns:a16="http://schemas.microsoft.com/office/drawing/2014/main" id="{7D75FBDF-7967-5426-49AF-DF3A9D023223}"/>
+                </a:ext>
+              </a:extLst>
+            </p:cNvPr>
+            <p:cNvSpPr/>
+            <p:nvPr/>
+          </p:nvSpPr>
+          <p:spPr>
+            <a:xfrm>
+              <a:off x="10116328" y="3190967"/>
+              <a:ext cx="200085" cy="135334"/>
+            </a:xfrm>
+            <a:prstGeom prst="rect">
+              <a:avLst/>
+            </a:prstGeom>
+            <a:solidFill>
+              <a:schemeClr val="bg1"/>
+            </a:solidFill>
+            <a:ln>
+              <a:noFill/>
+            </a:ln>
+          </p:spPr>
+          <p:style>
+            <a:lnRef idx="2">
+              <a:schemeClr val="accent1">
+                <a:shade val="15000"/>
+              </a:schemeClr>
+            </a:lnRef>
+            <a:fillRef idx="1">
+              <a:schemeClr val="accent1"/>
+            </a:fillRef>
+            <a:effectRef idx="0">
+              <a:schemeClr val="accent1"/>
+            </a:effectRef>
+            <a:fontRef idx="minor">
+              <a:schemeClr val="lt1"/>
+            </a:fontRef>
+          </p:style>
+          <p:txBody>
+            <a:bodyPr rtlCol="0" anchor="ctr"/>
+            <a:lstStyle/>
+            <a:p>
+              <a:pPr algn="ctr"/>
+              <a:endParaRPr kumimoji="1" lang="ja-JP" altLang="en-US"/>
+            </a:p>
+          </p:txBody>
+        </p:sp>
+        <p:sp>
+          <p:nvSpPr>
+            <p:cNvPr id="453" name="正方形/長方形 452">
+              <a:extLst>
+                <a:ext uri="{FF2B5EF4-FFF2-40B4-BE49-F238E27FC236}">
+                  <a16:creationId xmlns:a16="http://schemas.microsoft.com/office/drawing/2014/main" id="{1D8A4975-759D-DD4B-13D5-8F1C19CF159E}"/>
+                </a:ext>
+              </a:extLst>
+            </p:cNvPr>
+            <p:cNvSpPr/>
+            <p:nvPr/>
+          </p:nvSpPr>
+          <p:spPr>
+            <a:xfrm>
+              <a:off x="11174785" y="3214031"/>
+              <a:ext cx="200085" cy="111528"/>
             </a:xfrm>
             <a:prstGeom prst="rect">
               <a:avLst/>
@@ -13545,10 +13231,10 @@
         </p:sp>
         <p:cxnSp>
           <p:nvCxnSpPr>
-            <p:cNvPr id="573" name="直線コネクタ 572">
-              <a:extLst>
-                <a:ext uri="{FF2B5EF4-FFF2-40B4-BE49-F238E27FC236}">
-                  <a16:creationId xmlns:a16="http://schemas.microsoft.com/office/drawing/2014/main" id="{8DAA78F0-93AC-F1C9-76A1-A65F9A45B123}"/>
+            <p:cNvPr id="578" name="直線コネクタ 577">
+              <a:extLst>
+                <a:ext uri="{FF2B5EF4-FFF2-40B4-BE49-F238E27FC236}">
+                  <a16:creationId xmlns:a16="http://schemas.microsoft.com/office/drawing/2014/main" id="{437705D0-7DAE-8CC6-8C27-6D40821C849C}"/>
                 </a:ext>
               </a:extLst>
             </p:cNvPr>
@@ -13558,9 +13244,9 @@
             <p:nvPr/>
           </p:nvCxnSpPr>
           <p:spPr>
-            <a:xfrm flipH="1">
-              <a:off x="10594340" y="5616813"/>
-              <a:ext cx="732790" cy="0"/>
+            <a:xfrm flipV="1">
+              <a:off x="10219655" y="3181146"/>
+              <a:ext cx="0" cy="288494"/>
             </a:xfrm>
             <a:prstGeom prst="line">
               <a:avLst/>
@@ -13569,7 +13255,7 @@
               <a:solidFill>
                 <a:schemeClr val="tx1"/>
               </a:solidFill>
-              <a:tailEnd type="triangle"/>
+              <a:tailEnd type="triangle" w="sm" len="sm"/>
             </a:ln>
           </p:spPr>
           <p:style>
@@ -13589,10 +13275,10 @@
         </p:cxnSp>
         <p:cxnSp>
           <p:nvCxnSpPr>
-            <p:cNvPr id="578" name="直線コネクタ 577">
-              <a:extLst>
-                <a:ext uri="{FF2B5EF4-FFF2-40B4-BE49-F238E27FC236}">
-                  <a16:creationId xmlns:a16="http://schemas.microsoft.com/office/drawing/2014/main" id="{437705D0-7DAE-8CC6-8C27-6D40821C849C}"/>
+            <p:cNvPr id="570" name="直線コネクタ 569">
+              <a:extLst>
+                <a:ext uri="{FF2B5EF4-FFF2-40B4-BE49-F238E27FC236}">
+                  <a16:creationId xmlns:a16="http://schemas.microsoft.com/office/drawing/2014/main" id="{FC317399-BD8E-6BF5-14B8-3E2250718876}"/>
                 </a:ext>
               </a:extLst>
             </p:cNvPr>
@@ -13602,9 +13288,9 @@
             <p:nvPr/>
           </p:nvCxnSpPr>
           <p:spPr>
-            <a:xfrm flipV="1">
-              <a:off x="10259060" y="3333546"/>
-              <a:ext cx="0" cy="507738"/>
+            <a:xfrm flipH="1">
+              <a:off x="6830966" y="3478064"/>
+              <a:ext cx="4479329" cy="0"/>
             </a:xfrm>
             <a:prstGeom prst="line">
               <a:avLst/>
@@ -13613,7 +13299,7 @@
               <a:solidFill>
                 <a:schemeClr val="tx1"/>
               </a:solidFill>
-              <a:tailEnd type="triangle"/>
+              <a:tailEnd type="none"/>
             </a:ln>
           </p:spPr>
           <p:style>
@@ -13631,6 +13317,956 @@
             </a:fontRef>
           </p:style>
         </p:cxnSp>
+        <p:cxnSp>
+          <p:nvCxnSpPr>
+            <p:cNvPr id="568" name="直線コネクタ 567">
+              <a:extLst>
+                <a:ext uri="{FF2B5EF4-FFF2-40B4-BE49-F238E27FC236}">
+                  <a16:creationId xmlns:a16="http://schemas.microsoft.com/office/drawing/2014/main" id="{1882C085-2C97-7319-7E16-F7943050226B}"/>
+                </a:ext>
+              </a:extLst>
+            </p:cNvPr>
+            <p:cNvCxnSpPr>
+              <a:cxnSpLocks/>
+            </p:cNvCxnSpPr>
+            <p:nvPr/>
+          </p:nvCxnSpPr>
+          <p:spPr>
+            <a:xfrm flipV="1">
+              <a:off x="11274014" y="3172460"/>
+              <a:ext cx="0" cy="302260"/>
+            </a:xfrm>
+            <a:prstGeom prst="line">
+              <a:avLst/>
+            </a:prstGeom>
+            <a:ln w="76200">
+              <a:solidFill>
+                <a:schemeClr val="tx1"/>
+              </a:solidFill>
+              <a:headEnd type="none"/>
+              <a:tailEnd type="triangle" w="sm" len="sm"/>
+            </a:ln>
+          </p:spPr>
+          <p:style>
+            <a:lnRef idx="2">
+              <a:schemeClr val="accent1"/>
+            </a:lnRef>
+            <a:fillRef idx="0">
+              <a:schemeClr val="accent1"/>
+            </a:fillRef>
+            <a:effectRef idx="1">
+              <a:schemeClr val="accent1"/>
+            </a:effectRef>
+            <a:fontRef idx="minor">
+              <a:schemeClr val="tx1"/>
+            </a:fontRef>
+          </p:style>
+        </p:cxnSp>
+        <p:sp>
+          <p:nvSpPr>
+            <p:cNvPr id="472" name="正方形/長方形 471">
+              <a:extLst>
+                <a:ext uri="{FF2B5EF4-FFF2-40B4-BE49-F238E27FC236}">
+                  <a16:creationId xmlns:a16="http://schemas.microsoft.com/office/drawing/2014/main" id="{C7A5AE45-AFE2-B26F-BFD7-3DC4C7DA44E5}"/>
+                </a:ext>
+              </a:extLst>
+            </p:cNvPr>
+            <p:cNvSpPr/>
+            <p:nvPr/>
+          </p:nvSpPr>
+          <p:spPr>
+            <a:xfrm>
+              <a:off x="3416844" y="731306"/>
+              <a:ext cx="149402" cy="204628"/>
+            </a:xfrm>
+            <a:prstGeom prst="rect">
+              <a:avLst/>
+            </a:prstGeom>
+            <a:solidFill>
+              <a:schemeClr val="bg1">
+                <a:lumMod val="95000"/>
+              </a:schemeClr>
+            </a:solidFill>
+            <a:ln>
+              <a:noFill/>
+            </a:ln>
+          </p:spPr>
+          <p:style>
+            <a:lnRef idx="2">
+              <a:schemeClr val="accent1">
+                <a:shade val="15000"/>
+              </a:schemeClr>
+            </a:lnRef>
+            <a:fillRef idx="1">
+              <a:schemeClr val="accent1"/>
+            </a:fillRef>
+            <a:effectRef idx="0">
+              <a:schemeClr val="accent1"/>
+            </a:effectRef>
+            <a:fontRef idx="minor">
+              <a:schemeClr val="lt1"/>
+            </a:fontRef>
+          </p:style>
+          <p:txBody>
+            <a:bodyPr rtlCol="0" anchor="ctr"/>
+            <a:lstStyle/>
+            <a:p>
+              <a:pPr algn="ctr"/>
+              <a:endParaRPr kumimoji="1" lang="ja-JP" altLang="en-US"/>
+            </a:p>
+          </p:txBody>
+        </p:sp>
+        <p:cxnSp>
+          <p:nvCxnSpPr>
+            <p:cNvPr id="154" name="直線矢印コネクタ 153">
+              <a:extLst>
+                <a:ext uri="{FF2B5EF4-FFF2-40B4-BE49-F238E27FC236}">
+                  <a16:creationId xmlns:a16="http://schemas.microsoft.com/office/drawing/2014/main" id="{9DC5BA02-A8F4-CA5C-4145-FC0B19F733F7}"/>
+                </a:ext>
+              </a:extLst>
+            </p:cNvPr>
+            <p:cNvCxnSpPr>
+              <a:cxnSpLocks/>
+            </p:cNvCxnSpPr>
+            <p:nvPr/>
+          </p:nvCxnSpPr>
+          <p:spPr>
+            <a:xfrm>
+              <a:off x="2358498" y="825985"/>
+              <a:ext cx="4049597" cy="0"/>
+            </a:xfrm>
+            <a:prstGeom prst="straightConnector1">
+              <a:avLst/>
+            </a:prstGeom>
+            <a:ln w="76200">
+              <a:solidFill>
+                <a:schemeClr val="tx1"/>
+              </a:solidFill>
+              <a:tailEnd type="none" w="med" len="sm"/>
+            </a:ln>
+          </p:spPr>
+          <p:style>
+            <a:lnRef idx="2">
+              <a:schemeClr val="accent1"/>
+            </a:lnRef>
+            <a:fillRef idx="0">
+              <a:schemeClr val="accent1"/>
+            </a:fillRef>
+            <a:effectRef idx="1">
+              <a:schemeClr val="accent1"/>
+            </a:effectRef>
+            <a:fontRef idx="minor">
+              <a:schemeClr val="tx1"/>
+            </a:fontRef>
+          </p:style>
+        </p:cxnSp>
+        <p:sp>
+          <p:nvSpPr>
+            <p:cNvPr id="473" name="正方形/長方形 472">
+              <a:extLst>
+                <a:ext uri="{FF2B5EF4-FFF2-40B4-BE49-F238E27FC236}">
+                  <a16:creationId xmlns:a16="http://schemas.microsoft.com/office/drawing/2014/main" id="{D8F253AB-A381-4EB9-E6FA-D7B13F635A1A}"/>
+                </a:ext>
+              </a:extLst>
+            </p:cNvPr>
+            <p:cNvSpPr/>
+            <p:nvPr/>
+          </p:nvSpPr>
+          <p:spPr>
+            <a:xfrm>
+              <a:off x="3416043" y="1847098"/>
+              <a:ext cx="149402" cy="204628"/>
+            </a:xfrm>
+            <a:prstGeom prst="rect">
+              <a:avLst/>
+            </a:prstGeom>
+            <a:solidFill>
+              <a:schemeClr val="bg1">
+                <a:lumMod val="95000"/>
+              </a:schemeClr>
+            </a:solidFill>
+            <a:ln>
+              <a:noFill/>
+            </a:ln>
+          </p:spPr>
+          <p:style>
+            <a:lnRef idx="2">
+              <a:schemeClr val="accent1">
+                <a:shade val="15000"/>
+              </a:schemeClr>
+            </a:lnRef>
+            <a:fillRef idx="1">
+              <a:schemeClr val="accent1"/>
+            </a:fillRef>
+            <a:effectRef idx="0">
+              <a:schemeClr val="accent1"/>
+            </a:effectRef>
+            <a:fontRef idx="minor">
+              <a:schemeClr val="lt1"/>
+            </a:fontRef>
+          </p:style>
+          <p:txBody>
+            <a:bodyPr rtlCol="0" anchor="ctr"/>
+            <a:lstStyle/>
+            <a:p>
+              <a:pPr algn="ctr"/>
+              <a:endParaRPr kumimoji="1" lang="ja-JP" altLang="en-US"/>
+            </a:p>
+          </p:txBody>
+        </p:sp>
+        <p:cxnSp>
+          <p:nvCxnSpPr>
+            <p:cNvPr id="72" name="直線矢印コネクタ 71">
+              <a:extLst>
+                <a:ext uri="{FF2B5EF4-FFF2-40B4-BE49-F238E27FC236}">
+                  <a16:creationId xmlns:a16="http://schemas.microsoft.com/office/drawing/2014/main" id="{1CC2F722-7067-8B6A-4567-A8D074E84883}"/>
+                </a:ext>
+              </a:extLst>
+            </p:cNvPr>
+            <p:cNvCxnSpPr>
+              <a:cxnSpLocks/>
+            </p:cNvCxnSpPr>
+            <p:nvPr/>
+          </p:nvCxnSpPr>
+          <p:spPr>
+            <a:xfrm>
+              <a:off x="3168243" y="1949412"/>
+              <a:ext cx="861305" cy="0"/>
+            </a:xfrm>
+            <a:prstGeom prst="straightConnector1">
+              <a:avLst/>
+            </a:prstGeom>
+            <a:ln w="76200">
+              <a:solidFill>
+                <a:schemeClr val="tx1"/>
+              </a:solidFill>
+              <a:tailEnd type="triangle" w="med" len="sm"/>
+            </a:ln>
+          </p:spPr>
+          <p:style>
+            <a:lnRef idx="2">
+              <a:schemeClr val="accent1"/>
+            </a:lnRef>
+            <a:fillRef idx="0">
+              <a:schemeClr val="accent1"/>
+            </a:fillRef>
+            <a:effectRef idx="1">
+              <a:schemeClr val="accent1"/>
+            </a:effectRef>
+            <a:fontRef idx="minor">
+              <a:schemeClr val="tx1"/>
+            </a:fontRef>
+          </p:style>
+        </p:cxnSp>
+        <p:sp>
+          <p:nvSpPr>
+            <p:cNvPr id="475" name="正方形/長方形 474">
+              <a:extLst>
+                <a:ext uri="{FF2B5EF4-FFF2-40B4-BE49-F238E27FC236}">
+                  <a16:creationId xmlns:a16="http://schemas.microsoft.com/office/drawing/2014/main" id="{D3DBFCD3-D384-6EC4-0AF9-BC05E659F35A}"/>
+                </a:ext>
+              </a:extLst>
+            </p:cNvPr>
+            <p:cNvSpPr/>
+            <p:nvPr/>
+          </p:nvSpPr>
+          <p:spPr>
+            <a:xfrm>
+              <a:off x="3414983" y="3292506"/>
+              <a:ext cx="149402" cy="204628"/>
+            </a:xfrm>
+            <a:prstGeom prst="rect">
+              <a:avLst/>
+            </a:prstGeom>
+            <a:solidFill>
+              <a:schemeClr val="bg1">
+                <a:lumMod val="95000"/>
+              </a:schemeClr>
+            </a:solidFill>
+            <a:ln>
+              <a:noFill/>
+            </a:ln>
+          </p:spPr>
+          <p:style>
+            <a:lnRef idx="2">
+              <a:schemeClr val="accent1">
+                <a:shade val="15000"/>
+              </a:schemeClr>
+            </a:lnRef>
+            <a:fillRef idx="1">
+              <a:schemeClr val="accent1"/>
+            </a:fillRef>
+            <a:effectRef idx="0">
+              <a:schemeClr val="accent1"/>
+            </a:effectRef>
+            <a:fontRef idx="minor">
+              <a:schemeClr val="lt1"/>
+            </a:fontRef>
+          </p:style>
+          <p:txBody>
+            <a:bodyPr rtlCol="0" anchor="ctr"/>
+            <a:lstStyle/>
+            <a:p>
+              <a:pPr algn="ctr"/>
+              <a:endParaRPr kumimoji="1" lang="ja-JP" altLang="en-US"/>
+            </a:p>
+          </p:txBody>
+        </p:sp>
+        <p:cxnSp>
+          <p:nvCxnSpPr>
+            <p:cNvPr id="167" name="直線コネクタ 166">
+              <a:extLst>
+                <a:ext uri="{FF2B5EF4-FFF2-40B4-BE49-F238E27FC236}">
+                  <a16:creationId xmlns:a16="http://schemas.microsoft.com/office/drawing/2014/main" id="{FC0E2071-A865-F3A3-1C3D-B5F56D8C7C66}"/>
+                </a:ext>
+              </a:extLst>
+            </p:cNvPr>
+            <p:cNvCxnSpPr>
+              <a:cxnSpLocks/>
+            </p:cNvCxnSpPr>
+            <p:nvPr/>
+          </p:nvCxnSpPr>
+          <p:spPr>
+            <a:xfrm>
+              <a:off x="3164381" y="3399859"/>
+              <a:ext cx="528109" cy="0"/>
+            </a:xfrm>
+            <a:prstGeom prst="line">
+              <a:avLst/>
+            </a:prstGeom>
+            <a:ln w="76200">
+              <a:solidFill>
+                <a:schemeClr val="tx1"/>
+              </a:solidFill>
+            </a:ln>
+          </p:spPr>
+          <p:style>
+            <a:lnRef idx="2">
+              <a:schemeClr val="accent1"/>
+            </a:lnRef>
+            <a:fillRef idx="0">
+              <a:schemeClr val="accent1"/>
+            </a:fillRef>
+            <a:effectRef idx="1">
+              <a:schemeClr val="accent1"/>
+            </a:effectRef>
+            <a:fontRef idx="minor">
+              <a:schemeClr val="tx1"/>
+            </a:fontRef>
+          </p:style>
+        </p:cxnSp>
+        <p:sp>
+          <p:nvSpPr>
+            <p:cNvPr id="476" name="正方形/長方形 475">
+              <a:extLst>
+                <a:ext uri="{FF2B5EF4-FFF2-40B4-BE49-F238E27FC236}">
+                  <a16:creationId xmlns:a16="http://schemas.microsoft.com/office/drawing/2014/main" id="{5B2495ED-5324-9E97-F42D-0F49275EC75E}"/>
+                </a:ext>
+              </a:extLst>
+            </p:cNvPr>
+            <p:cNvSpPr/>
+            <p:nvPr/>
+          </p:nvSpPr>
+          <p:spPr>
+            <a:xfrm>
+              <a:off x="3417117" y="4664891"/>
+              <a:ext cx="149402" cy="204628"/>
+            </a:xfrm>
+            <a:prstGeom prst="rect">
+              <a:avLst/>
+            </a:prstGeom>
+            <a:solidFill>
+              <a:schemeClr val="bg1">
+                <a:lumMod val="95000"/>
+              </a:schemeClr>
+            </a:solidFill>
+            <a:ln>
+              <a:noFill/>
+            </a:ln>
+          </p:spPr>
+          <p:style>
+            <a:lnRef idx="2">
+              <a:schemeClr val="accent1">
+                <a:shade val="15000"/>
+              </a:schemeClr>
+            </a:lnRef>
+            <a:fillRef idx="1">
+              <a:schemeClr val="accent1"/>
+            </a:fillRef>
+            <a:effectRef idx="0">
+              <a:schemeClr val="accent1"/>
+            </a:effectRef>
+            <a:fontRef idx="minor">
+              <a:schemeClr val="lt1"/>
+            </a:fontRef>
+          </p:style>
+          <p:txBody>
+            <a:bodyPr rtlCol="0" anchor="ctr"/>
+            <a:lstStyle/>
+            <a:p>
+              <a:pPr algn="ctr"/>
+              <a:endParaRPr kumimoji="1" lang="ja-JP" altLang="en-US"/>
+            </a:p>
+          </p:txBody>
+        </p:sp>
+        <p:cxnSp>
+          <p:nvCxnSpPr>
+            <p:cNvPr id="393" name="直線矢印コネクタ 392">
+              <a:extLst>
+                <a:ext uri="{FF2B5EF4-FFF2-40B4-BE49-F238E27FC236}">
+                  <a16:creationId xmlns:a16="http://schemas.microsoft.com/office/drawing/2014/main" id="{F759EB83-70BB-C682-7085-215A329A1549}"/>
+                </a:ext>
+              </a:extLst>
+            </p:cNvPr>
+            <p:cNvCxnSpPr>
+              <a:cxnSpLocks/>
+            </p:cNvCxnSpPr>
+            <p:nvPr/>
+          </p:nvCxnSpPr>
+          <p:spPr>
+            <a:xfrm>
+              <a:off x="3170101" y="4773300"/>
+              <a:ext cx="562936" cy="0"/>
+            </a:xfrm>
+            <a:prstGeom prst="straightConnector1">
+              <a:avLst/>
+            </a:prstGeom>
+            <a:ln w="76200">
+              <a:solidFill>
+                <a:schemeClr val="tx1"/>
+              </a:solidFill>
+              <a:tailEnd type="triangle" w="med" len="sm"/>
+            </a:ln>
+          </p:spPr>
+          <p:style>
+            <a:lnRef idx="2">
+              <a:schemeClr val="accent1"/>
+            </a:lnRef>
+            <a:fillRef idx="0">
+              <a:schemeClr val="accent1"/>
+            </a:fillRef>
+            <a:effectRef idx="1">
+              <a:schemeClr val="accent1"/>
+            </a:effectRef>
+            <a:fontRef idx="minor">
+              <a:schemeClr val="tx1"/>
+            </a:fontRef>
+          </p:style>
+        </p:cxnSp>
+        <p:sp>
+          <p:nvSpPr>
+            <p:cNvPr id="478" name="正方形/長方形 477">
+              <a:extLst>
+                <a:ext uri="{FF2B5EF4-FFF2-40B4-BE49-F238E27FC236}">
+                  <a16:creationId xmlns:a16="http://schemas.microsoft.com/office/drawing/2014/main" id="{3986CE58-E1DC-1171-1BB7-E2CA48E3F6F6}"/>
+                </a:ext>
+              </a:extLst>
+            </p:cNvPr>
+            <p:cNvSpPr/>
+            <p:nvPr/>
+          </p:nvSpPr>
+          <p:spPr>
+            <a:xfrm>
+              <a:off x="3415975" y="5693591"/>
+              <a:ext cx="149402" cy="204628"/>
+            </a:xfrm>
+            <a:prstGeom prst="rect">
+              <a:avLst/>
+            </a:prstGeom>
+            <a:solidFill>
+              <a:schemeClr val="bg1">
+                <a:lumMod val="95000"/>
+              </a:schemeClr>
+            </a:solidFill>
+            <a:ln>
+              <a:noFill/>
+            </a:ln>
+          </p:spPr>
+          <p:style>
+            <a:lnRef idx="2">
+              <a:schemeClr val="accent1">
+                <a:shade val="15000"/>
+              </a:schemeClr>
+            </a:lnRef>
+            <a:fillRef idx="1">
+              <a:schemeClr val="accent1"/>
+            </a:fillRef>
+            <a:effectRef idx="0">
+              <a:schemeClr val="accent1"/>
+            </a:effectRef>
+            <a:fontRef idx="minor">
+              <a:schemeClr val="lt1"/>
+            </a:fontRef>
+          </p:style>
+          <p:txBody>
+            <a:bodyPr rtlCol="0" anchor="ctr"/>
+            <a:lstStyle/>
+            <a:p>
+              <a:pPr algn="ctr"/>
+              <a:endParaRPr kumimoji="1" lang="ja-JP" altLang="en-US"/>
+            </a:p>
+          </p:txBody>
+        </p:sp>
+        <p:cxnSp>
+          <p:nvCxnSpPr>
+            <p:cNvPr id="399" name="直線矢印コネクタ 398">
+              <a:extLst>
+                <a:ext uri="{FF2B5EF4-FFF2-40B4-BE49-F238E27FC236}">
+                  <a16:creationId xmlns:a16="http://schemas.microsoft.com/office/drawing/2014/main" id="{D07124DE-83ED-819D-9A12-D8457380A8C0}"/>
+                </a:ext>
+              </a:extLst>
+            </p:cNvPr>
+            <p:cNvCxnSpPr>
+              <a:cxnSpLocks/>
+            </p:cNvCxnSpPr>
+            <p:nvPr/>
+          </p:nvCxnSpPr>
+          <p:spPr>
+            <a:xfrm flipH="1">
+              <a:off x="3211353" y="5792157"/>
+              <a:ext cx="501015" cy="0"/>
+            </a:xfrm>
+            <a:prstGeom prst="straightConnector1">
+              <a:avLst/>
+            </a:prstGeom>
+            <a:ln w="76200">
+              <a:solidFill>
+                <a:schemeClr val="tx1"/>
+              </a:solidFill>
+              <a:headEnd type="triangle" w="med" len="sm"/>
+              <a:tailEnd type="triangle" w="med" len="sm"/>
+            </a:ln>
+          </p:spPr>
+          <p:style>
+            <a:lnRef idx="2">
+              <a:schemeClr val="accent1"/>
+            </a:lnRef>
+            <a:fillRef idx="0">
+              <a:schemeClr val="accent1"/>
+            </a:fillRef>
+            <a:effectRef idx="1">
+              <a:schemeClr val="accent1"/>
+            </a:effectRef>
+            <a:fontRef idx="minor">
+              <a:schemeClr val="tx1"/>
+            </a:fontRef>
+          </p:style>
+        </p:cxnSp>
+        <p:sp>
+          <p:nvSpPr>
+            <p:cNvPr id="485" name="四角形: 角を丸くする 484">
+              <a:extLst>
+                <a:ext uri="{FF2B5EF4-FFF2-40B4-BE49-F238E27FC236}">
+                  <a16:creationId xmlns:a16="http://schemas.microsoft.com/office/drawing/2014/main" id="{0F72FD56-7875-E096-2EB4-94325B5BB9DF}"/>
+                </a:ext>
+              </a:extLst>
+            </p:cNvPr>
+            <p:cNvSpPr/>
+            <p:nvPr/>
+          </p:nvSpPr>
+          <p:spPr>
+            <a:xfrm>
+              <a:off x="6469055" y="6156961"/>
+              <a:ext cx="545473" cy="539803"/>
+            </a:xfrm>
+            <a:prstGeom prst="roundRect">
+              <a:avLst>
+                <a:gd name="adj" fmla="val 34136"/>
+              </a:avLst>
+            </a:prstGeom>
+            <a:solidFill>
+              <a:schemeClr val="bg1">
+                <a:lumMod val="95000"/>
+              </a:schemeClr>
+            </a:solidFill>
+            <a:ln w="57150">
+              <a:solidFill>
+                <a:schemeClr val="tx1"/>
+              </a:solidFill>
+            </a:ln>
+          </p:spPr>
+          <p:style>
+            <a:lnRef idx="2">
+              <a:schemeClr val="accent1">
+                <a:shade val="15000"/>
+              </a:schemeClr>
+            </a:lnRef>
+            <a:fillRef idx="1">
+              <a:schemeClr val="accent1"/>
+            </a:fillRef>
+            <a:effectRef idx="0">
+              <a:schemeClr val="accent1"/>
+            </a:effectRef>
+            <a:fontRef idx="minor">
+              <a:schemeClr val="lt1"/>
+            </a:fontRef>
+          </p:style>
+          <p:txBody>
+            <a:bodyPr rtlCol="0" anchor="ctr"/>
+            <a:lstStyle/>
+            <a:p>
+              <a:pPr algn="ctr"/>
+              <a:endParaRPr lang="ja-JP" altLang="en-US" dirty="0">
+                <a:solidFill>
+                  <a:schemeClr val="tx1"/>
+                </a:solidFill>
+                <a:latin typeface="モボ-SemiBold" panose="02000700000000000000" pitchFamily="50" charset="-128"/>
+                <a:ea typeface="モボ-SemiBold" panose="02000700000000000000" pitchFamily="50" charset="-128"/>
+              </a:endParaRPr>
+            </a:p>
+          </p:txBody>
+        </p:sp>
+        <p:cxnSp>
+          <p:nvCxnSpPr>
+            <p:cNvPr id="559" name="直線コネクタ 558">
+              <a:extLst>
+                <a:ext uri="{FF2B5EF4-FFF2-40B4-BE49-F238E27FC236}">
+                  <a16:creationId xmlns:a16="http://schemas.microsoft.com/office/drawing/2014/main" id="{26C83082-64F7-DCC5-9E00-5B47D6830C23}"/>
+                </a:ext>
+              </a:extLst>
+            </p:cNvPr>
+            <p:cNvCxnSpPr>
+              <a:cxnSpLocks/>
+            </p:cNvCxnSpPr>
+            <p:nvPr/>
+          </p:nvCxnSpPr>
+          <p:spPr>
+            <a:xfrm flipV="1">
+              <a:off x="6830966" y="3445381"/>
+              <a:ext cx="0" cy="2591564"/>
+            </a:xfrm>
+            <a:prstGeom prst="line">
+              <a:avLst/>
+            </a:prstGeom>
+            <a:ln w="76200">
+              <a:solidFill>
+                <a:schemeClr val="tx1"/>
+              </a:solidFill>
+              <a:headEnd type="none"/>
+              <a:tailEnd type="none"/>
+            </a:ln>
+          </p:spPr>
+          <p:style>
+            <a:lnRef idx="2">
+              <a:schemeClr val="accent1"/>
+            </a:lnRef>
+            <a:fillRef idx="0">
+              <a:schemeClr val="accent1"/>
+            </a:fillRef>
+            <a:effectRef idx="1">
+              <a:schemeClr val="accent1"/>
+            </a:effectRef>
+            <a:fontRef idx="minor">
+              <a:schemeClr val="tx1"/>
+            </a:fontRef>
+          </p:style>
+        </p:cxnSp>
+        <p:sp>
+          <p:nvSpPr>
+            <p:cNvPr id="60" name="正方形/長方形 59">
+              <a:extLst>
+                <a:ext uri="{FF2B5EF4-FFF2-40B4-BE49-F238E27FC236}">
+                  <a16:creationId xmlns:a16="http://schemas.microsoft.com/office/drawing/2014/main" id="{61881671-6ABD-5A7F-DA70-39BF7869CCF2}"/>
+                </a:ext>
+              </a:extLst>
+            </p:cNvPr>
+            <p:cNvSpPr/>
+            <p:nvPr/>
+          </p:nvSpPr>
+          <p:spPr>
+            <a:xfrm>
+              <a:off x="6763608" y="4008120"/>
+              <a:ext cx="134730" cy="205737"/>
+            </a:xfrm>
+            <a:prstGeom prst="rect">
+              <a:avLst/>
+            </a:prstGeom>
+            <a:solidFill>
+              <a:schemeClr val="bg1">
+                <a:lumMod val="95000"/>
+              </a:schemeClr>
+            </a:solidFill>
+            <a:ln>
+              <a:noFill/>
+            </a:ln>
+          </p:spPr>
+          <p:style>
+            <a:lnRef idx="2">
+              <a:schemeClr val="accent1">
+                <a:shade val="15000"/>
+              </a:schemeClr>
+            </a:lnRef>
+            <a:fillRef idx="1">
+              <a:schemeClr val="accent1"/>
+            </a:fillRef>
+            <a:effectRef idx="0">
+              <a:schemeClr val="accent1"/>
+            </a:effectRef>
+            <a:fontRef idx="minor">
+              <a:schemeClr val="lt1"/>
+            </a:fontRef>
+          </p:style>
+          <p:txBody>
+            <a:bodyPr rtlCol="0" anchor="ctr"/>
+            <a:lstStyle/>
+            <a:p>
+              <a:pPr algn="ctr"/>
+              <a:endParaRPr kumimoji="1" lang="ja-JP" altLang="en-US"/>
+            </a:p>
+          </p:txBody>
+        </p:sp>
+        <p:cxnSp>
+          <p:nvCxnSpPr>
+            <p:cNvPr id="474" name="直線コネクタ 473">
+              <a:extLst>
+                <a:ext uri="{FF2B5EF4-FFF2-40B4-BE49-F238E27FC236}">
+                  <a16:creationId xmlns:a16="http://schemas.microsoft.com/office/drawing/2014/main" id="{C9E81AA6-2592-3861-1245-BA317783E4A4}"/>
+                </a:ext>
+              </a:extLst>
+            </p:cNvPr>
+            <p:cNvCxnSpPr>
+              <a:cxnSpLocks/>
+            </p:cNvCxnSpPr>
+            <p:nvPr/>
+          </p:nvCxnSpPr>
+          <p:spPr>
+            <a:xfrm flipH="1" flipV="1">
+              <a:off x="6452794" y="4112768"/>
+              <a:ext cx="4880686" cy="864"/>
+            </a:xfrm>
+            <a:prstGeom prst="line">
+              <a:avLst/>
+            </a:prstGeom>
+            <a:ln w="76200">
+              <a:solidFill>
+                <a:schemeClr val="tx1"/>
+              </a:solidFill>
+              <a:headEnd type="none"/>
+              <a:tailEnd type="none"/>
+            </a:ln>
+          </p:spPr>
+          <p:style>
+            <a:lnRef idx="2">
+              <a:schemeClr val="accent1"/>
+            </a:lnRef>
+            <a:fillRef idx="0">
+              <a:schemeClr val="accent1"/>
+            </a:fillRef>
+            <a:effectRef idx="1">
+              <a:schemeClr val="accent1"/>
+            </a:effectRef>
+            <a:fontRef idx="minor">
+              <a:schemeClr val="tx1"/>
+            </a:fontRef>
+          </p:style>
+        </p:cxnSp>
+        <p:sp>
+          <p:nvSpPr>
+            <p:cNvPr id="510" name="正方形/長方形 509">
+              <a:extLst>
+                <a:ext uri="{FF2B5EF4-FFF2-40B4-BE49-F238E27FC236}">
+                  <a16:creationId xmlns:a16="http://schemas.microsoft.com/office/drawing/2014/main" id="{60A1FB6B-C905-26C1-5871-CCA241C10897}"/>
+                </a:ext>
+              </a:extLst>
+            </p:cNvPr>
+            <p:cNvSpPr/>
+            <p:nvPr/>
+          </p:nvSpPr>
+          <p:spPr>
+            <a:xfrm>
+              <a:off x="6911596" y="5915199"/>
+              <a:ext cx="134730" cy="205737"/>
+            </a:xfrm>
+            <a:prstGeom prst="rect">
+              <a:avLst/>
+            </a:prstGeom>
+            <a:solidFill>
+              <a:schemeClr val="bg1">
+                <a:lumMod val="95000"/>
+              </a:schemeClr>
+            </a:solidFill>
+            <a:ln>
+              <a:noFill/>
+            </a:ln>
+          </p:spPr>
+          <p:style>
+            <a:lnRef idx="2">
+              <a:schemeClr val="accent1">
+                <a:shade val="15000"/>
+              </a:schemeClr>
+            </a:lnRef>
+            <a:fillRef idx="1">
+              <a:schemeClr val="accent1"/>
+            </a:fillRef>
+            <a:effectRef idx="0">
+              <a:schemeClr val="accent1"/>
+            </a:effectRef>
+            <a:fontRef idx="minor">
+              <a:schemeClr val="lt1"/>
+            </a:fontRef>
+          </p:style>
+          <p:txBody>
+            <a:bodyPr rtlCol="0" anchor="ctr"/>
+            <a:lstStyle/>
+            <a:p>
+              <a:pPr algn="ctr"/>
+              <a:endParaRPr kumimoji="1" lang="ja-JP" altLang="en-US"/>
+            </a:p>
+          </p:txBody>
+        </p:sp>
+        <p:cxnSp>
+          <p:nvCxnSpPr>
+            <p:cNvPr id="53" name="直線コネクタ 52">
+              <a:extLst>
+                <a:ext uri="{FF2B5EF4-FFF2-40B4-BE49-F238E27FC236}">
+                  <a16:creationId xmlns:a16="http://schemas.microsoft.com/office/drawing/2014/main" id="{8A3BDD87-4E75-62D8-EEE4-86ACF4981DE6}"/>
+                </a:ext>
+              </a:extLst>
+            </p:cNvPr>
+            <p:cNvCxnSpPr>
+              <a:cxnSpLocks/>
+            </p:cNvCxnSpPr>
+            <p:nvPr/>
+          </p:nvCxnSpPr>
+          <p:spPr>
+            <a:xfrm flipH="1">
+              <a:off x="6795135" y="6009242"/>
+              <a:ext cx="1104533" cy="0"/>
+            </a:xfrm>
+            <a:prstGeom prst="line">
+              <a:avLst/>
+            </a:prstGeom>
+            <a:ln w="76200">
+              <a:solidFill>
+                <a:schemeClr val="tx1"/>
+              </a:solidFill>
+              <a:headEnd type="triangle"/>
+              <a:tailEnd type="none"/>
+            </a:ln>
+          </p:spPr>
+          <p:style>
+            <a:lnRef idx="2">
+              <a:schemeClr val="accent1"/>
+            </a:lnRef>
+            <a:fillRef idx="0">
+              <a:schemeClr val="accent1"/>
+            </a:fillRef>
+            <a:effectRef idx="1">
+              <a:schemeClr val="accent1"/>
+            </a:effectRef>
+            <a:fontRef idx="minor">
+              <a:schemeClr val="tx1"/>
+            </a:fontRef>
+          </p:style>
+        </p:cxnSp>
+        <p:sp>
+          <p:nvSpPr>
+            <p:cNvPr id="511" name="正方形/長方形 510">
+              <a:extLst>
+                <a:ext uri="{FF2B5EF4-FFF2-40B4-BE49-F238E27FC236}">
+                  <a16:creationId xmlns:a16="http://schemas.microsoft.com/office/drawing/2014/main" id="{174BDAA1-EBAD-1C14-A607-A8737561BCFE}"/>
+                </a:ext>
+              </a:extLst>
+            </p:cNvPr>
+            <p:cNvSpPr/>
+            <p:nvPr/>
+          </p:nvSpPr>
+          <p:spPr>
+            <a:xfrm>
+              <a:off x="6478905" y="6061712"/>
+              <a:ext cx="508635" cy="318131"/>
+            </a:xfrm>
+            <a:prstGeom prst="rect">
+              <a:avLst/>
+            </a:prstGeom>
+            <a:solidFill>
+              <a:schemeClr val="bg1">
+                <a:lumMod val="95000"/>
+              </a:schemeClr>
+            </a:solidFill>
+            <a:ln>
+              <a:noFill/>
+            </a:ln>
+          </p:spPr>
+          <p:style>
+            <a:lnRef idx="2">
+              <a:schemeClr val="accent1">
+                <a:shade val="15000"/>
+              </a:schemeClr>
+            </a:lnRef>
+            <a:fillRef idx="1">
+              <a:schemeClr val="accent1"/>
+            </a:fillRef>
+            <a:effectRef idx="0">
+              <a:schemeClr val="accent1"/>
+            </a:effectRef>
+            <a:fontRef idx="minor">
+              <a:schemeClr val="lt1"/>
+            </a:fontRef>
+          </p:style>
+          <p:txBody>
+            <a:bodyPr rtlCol="0" anchor="ctr"/>
+            <a:lstStyle/>
+            <a:p>
+              <a:pPr algn="ctr"/>
+              <a:endParaRPr kumimoji="1" lang="ja-JP" altLang="en-US"/>
+            </a:p>
+          </p:txBody>
+        </p:sp>
+        <p:sp>
+          <p:nvSpPr>
+            <p:cNvPr id="65" name="正方形/長方形 64">
+              <a:extLst>
+                <a:ext uri="{FF2B5EF4-FFF2-40B4-BE49-F238E27FC236}">
+                  <a16:creationId xmlns:a16="http://schemas.microsoft.com/office/drawing/2014/main" id="{648395DD-57F5-8FDD-B2DE-B9007CD0A839}"/>
+                </a:ext>
+              </a:extLst>
+            </p:cNvPr>
+            <p:cNvSpPr/>
+            <p:nvPr/>
+          </p:nvSpPr>
+          <p:spPr>
+            <a:xfrm>
+              <a:off x="6386751" y="6228169"/>
+              <a:ext cx="238840" cy="437099"/>
+            </a:xfrm>
+            <a:prstGeom prst="rect">
+              <a:avLst/>
+            </a:prstGeom>
+            <a:solidFill>
+              <a:schemeClr val="bg1">
+                <a:lumMod val="95000"/>
+              </a:schemeClr>
+            </a:solidFill>
+            <a:ln>
+              <a:noFill/>
+            </a:ln>
+          </p:spPr>
+          <p:style>
+            <a:lnRef idx="2">
+              <a:schemeClr val="accent1">
+                <a:shade val="15000"/>
+              </a:schemeClr>
+            </a:lnRef>
+            <a:fillRef idx="1">
+              <a:schemeClr val="accent1"/>
+            </a:fillRef>
+            <a:effectRef idx="0">
+              <a:schemeClr val="accent1"/>
+            </a:effectRef>
+            <a:fontRef idx="minor">
+              <a:schemeClr val="lt1"/>
+            </a:fontRef>
+          </p:style>
+          <p:txBody>
+            <a:bodyPr rtlCol="0" anchor="ctr"/>
+            <a:lstStyle/>
+            <a:p>
+              <a:pPr algn="ctr"/>
+              <a:endParaRPr kumimoji="1" lang="ja-JP" altLang="en-US"/>
+            </a:p>
+          </p:txBody>
+        </p:sp>
       </p:grpSp>
     </p:spTree>
     <p:extLst>

--- a/fig/dawiy_system.pptx
+++ b/fig/dawiy_system.pptx
@@ -197,7 +197,7 @@
           <a:p>
             <a:fld id="{9853FA6F-AB6C-4E91-904D-1F00501D0D8D}" type="datetimeFigureOut">
               <a:rPr kumimoji="1" lang="ja-JP" altLang="en-US" smtClean="0"/>
-              <a:t>2026/2/12</a:t>
+              <a:t>2026/2/16</a:t>
             </a:fld>
             <a:endParaRPr kumimoji="1" lang="ja-JP" altLang="en-US"/>
           </a:p>
@@ -727,7 +727,7 @@
           <a:p>
             <a:fld id="{8EC94580-766A-4086-8B9F-7E7093B5BB0F}" type="datetimeFigureOut">
               <a:rPr kumimoji="1" lang="ja-JP" altLang="en-US" smtClean="0"/>
-              <a:t>2026/2/12</a:t>
+              <a:t>2026/2/16</a:t>
             </a:fld>
             <a:endParaRPr kumimoji="1" lang="ja-JP" altLang="en-US"/>
           </a:p>
@@ -957,7 +957,7 @@
           <a:p>
             <a:fld id="{8EC94580-766A-4086-8B9F-7E7093B5BB0F}" type="datetimeFigureOut">
               <a:rPr kumimoji="1" lang="ja-JP" altLang="en-US" smtClean="0"/>
-              <a:t>2026/2/12</a:t>
+              <a:t>2026/2/16</a:t>
             </a:fld>
             <a:endParaRPr kumimoji="1" lang="ja-JP" altLang="en-US"/>
           </a:p>
@@ -1197,7 +1197,7 @@
           <a:p>
             <a:fld id="{8EC94580-766A-4086-8B9F-7E7093B5BB0F}" type="datetimeFigureOut">
               <a:rPr kumimoji="1" lang="ja-JP" altLang="en-US" smtClean="0"/>
-              <a:t>2026/2/12</a:t>
+              <a:t>2026/2/16</a:t>
             </a:fld>
             <a:endParaRPr kumimoji="1" lang="ja-JP" altLang="en-US"/>
           </a:p>
@@ -1427,7 +1427,7 @@
           <a:p>
             <a:fld id="{8EC94580-766A-4086-8B9F-7E7093B5BB0F}" type="datetimeFigureOut">
               <a:rPr kumimoji="1" lang="ja-JP" altLang="en-US" smtClean="0"/>
-              <a:t>2026/2/12</a:t>
+              <a:t>2026/2/16</a:t>
             </a:fld>
             <a:endParaRPr kumimoji="1" lang="ja-JP" altLang="en-US"/>
           </a:p>
@@ -1702,7 +1702,7 @@
           <a:p>
             <a:fld id="{8EC94580-766A-4086-8B9F-7E7093B5BB0F}" type="datetimeFigureOut">
               <a:rPr kumimoji="1" lang="ja-JP" altLang="en-US" smtClean="0"/>
-              <a:t>2026/2/12</a:t>
+              <a:t>2026/2/16</a:t>
             </a:fld>
             <a:endParaRPr kumimoji="1" lang="ja-JP" altLang="en-US"/>
           </a:p>
@@ -2031,7 +2031,7 @@
           <a:p>
             <a:fld id="{8EC94580-766A-4086-8B9F-7E7093B5BB0F}" type="datetimeFigureOut">
               <a:rPr kumimoji="1" lang="ja-JP" altLang="en-US" smtClean="0"/>
-              <a:t>2026/2/12</a:t>
+              <a:t>2026/2/16</a:t>
             </a:fld>
             <a:endParaRPr kumimoji="1" lang="ja-JP" altLang="en-US"/>
           </a:p>
@@ -2507,7 +2507,7 @@
           <a:p>
             <a:fld id="{8EC94580-766A-4086-8B9F-7E7093B5BB0F}" type="datetimeFigureOut">
               <a:rPr kumimoji="1" lang="ja-JP" altLang="en-US" smtClean="0"/>
-              <a:t>2026/2/12</a:t>
+              <a:t>2026/2/16</a:t>
             </a:fld>
             <a:endParaRPr kumimoji="1" lang="ja-JP" altLang="en-US"/>
           </a:p>
@@ -2648,7 +2648,7 @@
           <a:p>
             <a:fld id="{8EC94580-766A-4086-8B9F-7E7093B5BB0F}" type="datetimeFigureOut">
               <a:rPr kumimoji="1" lang="ja-JP" altLang="en-US" smtClean="0"/>
-              <a:t>2026/2/12</a:t>
+              <a:t>2026/2/16</a:t>
             </a:fld>
             <a:endParaRPr kumimoji="1" lang="ja-JP" altLang="en-US"/>
           </a:p>
@@ -2761,7 +2761,7 @@
           <a:p>
             <a:fld id="{8EC94580-766A-4086-8B9F-7E7093B5BB0F}" type="datetimeFigureOut">
               <a:rPr kumimoji="1" lang="ja-JP" altLang="en-US" smtClean="0"/>
-              <a:t>2026/2/12</a:t>
+              <a:t>2026/2/16</a:t>
             </a:fld>
             <a:endParaRPr kumimoji="1" lang="ja-JP" altLang="en-US"/>
           </a:p>
@@ -3104,7 +3104,7 @@
           <a:p>
             <a:fld id="{8EC94580-766A-4086-8B9F-7E7093B5BB0F}" type="datetimeFigureOut">
               <a:rPr kumimoji="1" lang="ja-JP" altLang="en-US" smtClean="0"/>
-              <a:t>2026/2/12</a:t>
+              <a:t>2026/2/16</a:t>
             </a:fld>
             <a:endParaRPr kumimoji="1" lang="ja-JP" altLang="en-US"/>
           </a:p>
@@ -3392,7 +3392,7 @@
           <a:p>
             <a:fld id="{8EC94580-766A-4086-8B9F-7E7093B5BB0F}" type="datetimeFigureOut">
               <a:rPr kumimoji="1" lang="ja-JP" altLang="en-US" smtClean="0"/>
-              <a:t>2026/2/12</a:t>
+              <a:t>2026/2/16</a:t>
             </a:fld>
             <a:endParaRPr kumimoji="1" lang="ja-JP" altLang="en-US"/>
           </a:p>
@@ -3665,7 +3665,7 @@
           <a:p>
             <a:fld id="{8EC94580-766A-4086-8B9F-7E7093B5BB0F}" type="datetimeFigureOut">
               <a:rPr kumimoji="1" lang="ja-JP" altLang="en-US" smtClean="0"/>
-              <a:t>2026/2/12</a:t>
+              <a:t>2026/2/16</a:t>
             </a:fld>
             <a:endParaRPr kumimoji="1" lang="ja-JP" altLang="en-US"/>
           </a:p>
@@ -7751,8 +7751,8 @@
         </p:nvCxnSpPr>
         <p:spPr>
           <a:xfrm>
-            <a:off x="6359051" y="768427"/>
-            <a:ext cx="0" cy="2304650"/>
+            <a:off x="6359051" y="755640"/>
+            <a:ext cx="0" cy="2327856"/>
           </a:xfrm>
           <a:prstGeom prst="straightConnector1">
             <a:avLst/>
@@ -13356,7 +13356,7 @@
         </p:nvSpPr>
         <p:spPr>
           <a:xfrm>
-            <a:off x="3386364" y="700826"/>
+            <a:off x="3380122" y="700826"/>
             <a:ext cx="149402" cy="204628"/>
           </a:xfrm>
           <a:prstGeom prst="rect">
@@ -13454,7 +13454,7 @@
         </p:nvSpPr>
         <p:spPr>
           <a:xfrm>
-            <a:off x="3385563" y="1816618"/>
+            <a:off x="3379321" y="1816618"/>
             <a:ext cx="149402" cy="204628"/>
           </a:xfrm>
           <a:prstGeom prst="rect">
@@ -13552,7 +13552,7 @@
         </p:nvSpPr>
         <p:spPr>
           <a:xfrm>
-            <a:off x="3384503" y="3262026"/>
+            <a:off x="3378715" y="3262026"/>
             <a:ext cx="149402" cy="204628"/>
           </a:xfrm>
           <a:prstGeom prst="rect">
@@ -13649,7 +13649,7 @@
         </p:nvSpPr>
         <p:spPr>
           <a:xfrm>
-            <a:off x="3386637" y="4634411"/>
+            <a:off x="3375417" y="4634411"/>
             <a:ext cx="149402" cy="204628"/>
           </a:xfrm>
           <a:prstGeom prst="rect">
@@ -13747,7 +13747,7 @@
         </p:nvSpPr>
         <p:spPr>
           <a:xfrm>
-            <a:off x="3385495" y="5663111"/>
+            <a:off x="3379707" y="5663111"/>
             <a:ext cx="149402" cy="204628"/>
           </a:xfrm>
           <a:prstGeom prst="rect">
